--- a/ppt-defense/乳腺癌辅助诊断系统-答辩.pptx
+++ b/ppt-defense/乳腺癌辅助诊断系统-答辩.pptx
@@ -30,6 +30,17 @@
     <p:sldId id="278" r:id="rId30"/>
     <p:sldId id="279" r:id="rId31"/>
     <p:sldId id="280" r:id="rId32"/>
+    <p:sldId id="281" r:id="rId33"/>
+    <p:sldId id="282" r:id="rId34"/>
+    <p:sldId id="283" r:id="rId35"/>
+    <p:sldId id="284" r:id="rId36"/>
+    <p:sldId id="285" r:id="rId37"/>
+    <p:sldId id="286" r:id="rId38"/>
+    <p:sldId id="287" r:id="rId39"/>
+    <p:sldId id="288" r:id="rId40"/>
+    <p:sldId id="289" r:id="rId41"/>
+    <p:sldId id="290" r:id="rId42"/>
+    <p:sldId id="291" r:id="rId43"/>
   </p:sldIdLst>
   <p:sldSz cx="12191695" cy="6858000" type="screen4x3"/>
   <p:notesSz cx="6858000" cy="9144000"/>
@@ -531,7 +542,7 @@
           </a:p>
           <a:p>
             <a:r>
-              <a:t>目的：用一句话定调：系统卖点不是"又一个模型"，而是每个结论都能溯源。</a:t>
+              <a:t>目的：先说明这场答辩回答什么问题：概率如何变成可核对的依据。</a:t>
             </a:r>
           </a:p>
           <a:p>
@@ -541,27 +552,27 @@
           </a:p>
           <a:p>
             <a:r>
-              <a:t>- 开场先给结论：这是一个把模型判断、知识依据、操作动作串起来的系统。</a:t>
-            </a:r>
-          </a:p>
-          <a:p>
-            <a:r>
-              <a:t>- 指出三条主线：Agent 框架、RAG 知识库、管理端 Coze。</a:t>
-            </a:r>
-          </a:p>
-          <a:p>
-            <a:r>
-              <a:t>- 说明答辩结构：先讲用户端链路，再讲证据如何产生，最后讲运营与部署。</a:t>
-            </a:r>
-          </a:p>
-          <a:p>
-            <a:r>
-              <a:t>过渡：从"为什么需要出处"进入第一个问题。</a:t>
-            </a:r>
-          </a:p>
-          <a:p>
-            <a:r>
-              <a:t>提示：停顿 2 秒，确认投影比例</a:t>
+              <a:t>- 这个系统不是只输出一个良恶性，而是把概率、特征归因、知识依据和后续动作串起来。</a:t>
+            </a:r>
+          </a:p>
+          <a:p>
+            <a:r>
+              <a:t>- 三条主线：用户端 Agent 编排、可溯源 RAG、管理端运营智能体。</a:t>
+            </a:r>
+          </a:p>
+          <a:p>
+            <a:r>
+              <a:t>- 先讲问题，再讲实现，最后讲取舍和局限。</a:t>
+            </a:r>
+          </a:p>
+          <a:p>
+            <a:r>
+              <a:t>过渡：进入问题定义。</a:t>
+            </a:r>
+          </a:p>
+          <a:p>
+            <a:r>
+              <a:t>提示：停顿 2 秒</a:t>
             </a:r>
           </a:p>
         </p:txBody>
@@ -631,12 +642,12 @@
           <a:lstStyle/>
           <a:p>
             <a:r>
-              <a:t>【实现】工具集</a:t>
-            </a:r>
-          </a:p>
-          <a:p>
-            <a:r>
-              <a:t>目的：证明 Agent 的能力边界来自工具，而不是 prompt。</a:t>
+              <a:t>【架构】状态与检查点</a:t>
+            </a:r>
+          </a:p>
+          <a:p>
+            <a:r>
+              <a:t>目的：解释可回放不是口号：状态结构 + 检查点表。</a:t>
             </a:r>
           </a:p>
           <a:p>
@@ -646,22 +657,22 @@
           </a:p>
           <a:p>
             <a:r>
-              <a:t>- 工具是唯一的数据入口，避免模型直接拼 SQL 或读文件。</a:t>
-            </a:r>
-          </a:p>
-          <a:p>
-            <a:r>
-              <a:t>- 每个工具都有 schema、权限和超时；失败返回结构化错误。</a:t>
-            </a:r>
-          </a:p>
-          <a:p>
-            <a:r>
-              <a:t>- delegate 只能读、不能写，也不能再委派，防止递归失控。</a:t>
-            </a:r>
-          </a:p>
-          <a:p>
-            <a:r>
-              <a:t>过渡：工具之外，还有一条流式通道和子代理。</a:t>
+              <a:t>- state 里只有可序列化字段；emit 这类回调不会写进去。</a:t>
+            </a:r>
+          </a:p>
+          <a:p>
+            <a:r>
+              <a:t>- 每个节点执行完都保存 seq/node/next/state，Interrupt 也保存 pending。</a:t>
+            </a:r>
+          </a:p>
+          <a:p>
+            <a:r>
+              <a:t>- 这让我们能回答"第 4 步为什么慢""哪一步失败了"。</a:t>
+            </a:r>
+          </a:p>
+          <a:p>
+            <a:r>
+              <a:t>过渡：看一次真实执行的节点耗时。</a:t>
             </a:r>
           </a:p>
         </p:txBody>
@@ -731,12 +742,12 @@
           <a:lstStyle/>
           <a:p>
             <a:r>
-              <a:t>【实现】同步与流式</a:t>
-            </a:r>
-          </a:p>
-          <a:p>
-            <a:r>
-              <a:t>目的：解释为什么要两套入口，以及流式不是装饰。</a:t>
+              <a:t>【架构】真实执行</a:t>
+            </a:r>
+          </a:p>
+          <a:p>
+            <a:r>
+              <a:t>目的：用真实 trace 证明流程与耗时，不回避冷启动。</a:t>
             </a:r>
           </a:p>
           <a:p>
@@ -746,22 +757,22 @@
           </a:p>
           <a:p>
             <a:r>
-              <a:t>- 同步接口给评测和脚本，输出稳定、字段可断言。</a:t>
-            </a:r>
-          </a:p>
-          <a:p>
-            <a:r>
-              <a:t>- 流式接口把 thinking、工具调用、子代理步骤推给前端，用户能看到"它在干什么"。</a:t>
-            </a:r>
-          </a:p>
-          <a:p>
-            <a:r>
-              <a:t>- 两条链路共用同一个 Graph，避免行为分叉。</a:t>
-            </a:r>
-          </a:p>
-          <a:p>
-            <a:r>
-              <a:t>过渡：过程可见之后，还得保证结论可信。</a:t>
+              <a:t>- 这是"这个结果什么意思"的真实执行：10 个节点，act 占 139ms。</a:t>
+            </a:r>
+          </a:p>
+          <a:p>
+            <a:r>
+              <a:t>- act 里同时跑了 predict、explain 和特征词典检索，所以是最大头。</a:t>
+            </a:r>
+          </a:p>
+          <a:p>
+            <a:r>
+              <a:t>- 医学问题首次会到 30s，主要是 90MB 模型加载和重排；热查询约 1s。</a:t>
+            </a:r>
+          </a:p>
+          <a:p>
+            <a:r>
+              <a:t>过渡：工具是 act 的手脚，下面看 13 个工具。</a:t>
             </a:r>
           </a:p>
         </p:txBody>
@@ -831,12 +842,12 @@
           <a:lstStyle/>
           <a:p>
             <a:r>
-              <a:t>【可信度】三档不确定性</a:t>
-            </a:r>
-          </a:p>
-          <a:p>
-            <a:r>
-              <a:t>目的：这是系统最容易被质疑的点，主动讲清阈值与代价。</a:t>
+              <a:t>【架构】工具表</a:t>
+            </a:r>
+          </a:p>
+          <a:p>
+            <a:r>
+              <a:t>目的：用表格讲清工具契约，而不是罗列名称。</a:t>
             </a:r>
           </a:p>
           <a:p>
@@ -846,22 +857,22 @@
           </a:p>
           <a:p>
             <a:r>
-              <a:t>- 置信档正常回答；谨慎档给倾向但降级措辞；弃权档直接拒绝下结论。</a:t>
-            </a:r>
-          </a:p>
-          <a:p>
-            <a:r>
-              <a:t>- 输入距离是欧氏距离，超过 15 认为分布外，防止"自信地胡说"。</a:t>
-            </a:r>
-          </a:p>
-          <a:p>
-            <a:r>
-              <a:t>- 弃权不是失败：它把错误成本从"误导"降成"让用户补信息"。</a:t>
-            </a:r>
-          </a:p>
-          <a:p>
-            <a:r>
-              <a:t>过渡：判断可信之后，解释也要可信：看 grounding。</a:t>
+              <a:t>- 每个工具都有 schema、权限、超时、幂等标记；调用入口只有一个。</a:t>
+            </a:r>
+          </a:p>
+          <a:p>
+            <a:r>
+              <a:t>- 导出类非幂等，避免同问同答缓存返回旧文件；delegate 超时 90s。</a:t>
+            </a:r>
+          </a:p>
+          <a:p>
+            <a:r>
+              <a:t>- 模型不能直接读数据库或文件，权限在调用前判定。</a:t>
+            </a:r>
+          </a:p>
+          <a:p>
+            <a:r>
+              <a:t>过渡：工具之外，先决定走哪条路径：意图路由。</a:t>
             </a:r>
           </a:p>
         </p:txBody>
@@ -931,12 +942,12 @@
           <a:lstStyle/>
           <a:p>
             <a:r>
-              <a:t>【可信度】句子级 grounding</a:t>
-            </a:r>
-          </a:p>
-          <a:p>
-            <a:r>
-              <a:t>目的：解释"引用"不是装饰：每句话都要能对上事实。</a:t>
+              <a:t>【架构】意图路由</a:t>
+            </a:r>
+          </a:p>
+          <a:p>
+            <a:r>
+              <a:t>目的：讲分类规则、顺序和一个真实 bug。</a:t>
             </a:r>
           </a:p>
           <a:p>
@@ -946,22 +957,22 @@
           </a:p>
           <a:p>
             <a:r>
-              <a:t>- 切句是为了逐句核对，而不是整段糊过去。</a:t>
-            </a:r>
-          </a:p>
-          <a:p>
-            <a:r>
-              <a:t>- 数字对账优先：编造的数字最容易被识破，也最危险。</a:t>
-            </a:r>
-          </a:p>
-          <a:p>
-            <a:r>
-              <a:t>- 无出处的句子标"推断"或删除，verify 返回丢弃数量。</a:t>
-            </a:r>
-          </a:p>
-          <a:p>
-            <a:r>
-              <a:t>过渡：看真实问答里这些引用长什么样。</a:t>
+              <a:t>- 13 类意图覆盖解读、特征、医学、操作、历史、导出、对比、拒答等。</a:t>
+            </a:r>
+          </a:p>
+          <a:p>
+            <a:r>
+              <a:t>- 顺序很重要：导出动作要先判，否则"怎么导出报告"会被当成能力询问。</a:t>
+            </a:r>
+          </a:p>
+          <a:p>
+            <a:r>
+              <a:t>- 我们踩过"副作用"含"用"被判成操作问题的 bug，已修复并加回归用例。</a:t>
+            </a:r>
+          </a:p>
+          <a:p>
+            <a:r>
+              <a:t>过渡：路由之后，同一套图有两种交付方式。</a:t>
             </a:r>
           </a:p>
         </p:txBody>
@@ -1031,12 +1042,12 @@
           <a:lstStyle/>
           <a:p>
             <a:r>
-              <a:t>【可信度】可溯源回答</a:t>
-            </a:r>
-          </a:p>
-          <a:p>
-            <a:r>
-              <a:t>目的：用真实截图证明引用可点、来源可查。</a:t>
+              <a:t>【架构】同步与流式</a:t>
+            </a:r>
+          </a:p>
+          <a:p>
+            <a:r>
+              <a:t>目的：解释两套入口的必要性。</a:t>
             </a:r>
           </a:p>
           <a:p>
@@ -1046,22 +1057,22 @@
           </a:p>
           <a:p>
             <a:r>
-              <a:t>- 注意正文里的 [FEAT-008] 和底部芯片是同一套 clause_id。</a:t>
-            </a:r>
-          </a:p>
-          <a:p>
-            <a:r>
-              <a:t>- 底部还标注了来源级别：特征词典、NCI PDQ、指南。</a:t>
-            </a:r>
-          </a:p>
-          <a:p>
-            <a:r>
-              <a:t>- 如果某句没有依据，会被标成"推断"或直接删掉。</a:t>
-            </a:r>
-          </a:p>
-          <a:p>
-            <a:r>
-              <a:t>过渡：可信度讲完，进入知识库本身：这些条款从哪来？</a:t>
+              <a:t>- 同步接口输出稳定，评测和脚本直接断言字段。</a:t>
+            </a:r>
+          </a:p>
+          <a:p>
+            <a:r>
+              <a:t>- 流式接口把 thinking、token、工具调用推给前端，用户能看到进度。</a:t>
+            </a:r>
+          </a:p>
+          <a:p>
+            <a:r>
+              <a:t>- 两条链路共用同一个 Graph；流式失败会发 fallback 事件，前端自动重试。</a:t>
+            </a:r>
+          </a:p>
+          <a:p>
+            <a:r>
+              <a:t>过渡：还有一种执行体：子代理。</a:t>
             </a:r>
           </a:p>
         </p:txBody>
@@ -1131,12 +1142,12 @@
           <a:lstStyle/>
           <a:p>
             <a:r>
-              <a:t>【RAG】语料构成</a:t>
-            </a:r>
-          </a:p>
-          <a:p>
-            <a:r>
-              <a:t>目的：给出语料规模与来源结构，证明覆盖面和权威性分层。</a:t>
+              <a:t>【架构】子代理</a:t>
+            </a:r>
+          </a:p>
+          <a:p>
+            <a:r>
+              <a:t>目的：讲清 delegate 的边界与动机。</a:t>
             </a:r>
           </a:p>
           <a:p>
@@ -1146,22 +1157,22 @@
           </a:p>
           <a:p>
             <a:r>
-              <a:t>- NCI PDQ 是主力：治疗 487、筛查 212、预防 141。</a:t>
-            </a:r>
-          </a:p>
-          <a:p>
-            <a:r>
-              <a:t>- 中文来源包括 WHO、中国指南、NHS、MedlinePlus、维基。</a:t>
-            </a:r>
-          </a:p>
-          <a:p>
-            <a:r>
-              <a:t>- 特征词典和系统文档单独成域，避免和医学内容互相污染。</a:t>
-            </a:r>
-          </a:p>
-          <a:p>
-            <a:r>
-              <a:t>过渡：但有语料不等于能检索：先看治理前后。</a:t>
+              <a:t>- 主代理一次只处理一个问题；长任务拆给子代理。</a:t>
+            </a:r>
+          </a:p>
+          <a:p>
+            <a:r>
+              <a:t>- 子代理只读、不能递归、90 秒超时；失败主代理降级。</a:t>
+            </a:r>
+          </a:p>
+          <a:p>
+            <a:r>
+              <a:t>- 子步骤通过 sub_steps 事件回传，用户仍能看到过程。</a:t>
+            </a:r>
+          </a:p>
+          <a:p>
+            <a:r>
+              <a:t>过渡：执行体之外，还要决定"敢不敢下结论"。</a:t>
             </a:r>
           </a:p>
         </p:txBody>
@@ -1231,12 +1242,12 @@
           <a:lstStyle/>
           <a:p>
             <a:r>
-              <a:t>【RAG】语料治理</a:t>
-            </a:r>
-          </a:p>
-          <a:p>
-            <a:r>
-              <a:t>目的：说明"知识库乱"是怎么被修的：切块、去噪、去重、打标。</a:t>
+              <a:t>【可信度】三档不确定性</a:t>
+            </a:r>
+          </a:p>
+          <a:p>
+            <a:r>
+              <a:t>目的：讲清阈值、代价和弃权话术。</a:t>
             </a:r>
           </a:p>
           <a:p>
@@ -1246,22 +1257,22 @@
           </a:p>
           <a:p>
             <a:r>
-              <a:t>- 之前按 1100 字硬切，一个章节被切成 3–8 段，引用到"续 8"就丢了上下文。</a:t>
-            </a:r>
-          </a:p>
-          <a:p>
-            <a:r>
-              <a:t>- 现在按句子边界切 260–900 字，每条能独立读懂；噪声章节直接删。</a:t>
-            </a:r>
-          </a:p>
-          <a:p>
-            <a:r>
-              <a:t>- 补了副作用三源，因为之前问"化疗副作用"只能召回激素治疗。</a:t>
-            </a:r>
-          </a:p>
-          <a:p>
-            <a:r>
-              <a:t>过渡：治理完，讲检索怎么把对的条款捞出来。</a:t>
+              <a:t>- 置信档正常回答；谨慎档给倾向但降级措辞；弃权档直接拒绝下结论。</a:t>
+            </a:r>
+          </a:p>
+          <a:p>
+            <a:r>
+              <a:t>- 0.79 / 0.41 来自校准曲线与误判成本；15 是训练分布距离上限。</a:t>
+            </a:r>
+          </a:p>
+          <a:p>
+            <a:r>
+              <a:t>- 弃权不是失败，它把错误成本从"误导"降成"让用户补信息"。</a:t>
+            </a:r>
+          </a:p>
+          <a:p>
+            <a:r>
+              <a:t>过渡：判断可信之后，解释要逐句可核对。</a:t>
             </a:r>
           </a:p>
         </p:txBody>
@@ -1331,12 +1342,12 @@
           <a:lstStyle/>
           <a:p>
             <a:r>
-              <a:t>【RAG】混合检索</a:t>
-            </a:r>
-          </a:p>
-          <a:p>
-            <a:r>
-              <a:t>目的：讲清每条路径的作用与融合方式。</a:t>
+              <a:t>【可信度】Grounding</a:t>
+            </a:r>
+          </a:p>
+          <a:p>
+            <a:r>
+              <a:t>目的：讲句子级核对的四个步骤和容差。</a:t>
             </a:r>
           </a:p>
           <a:p>
@@ -1346,22 +1357,22 @@
           </a:p>
           <a:p>
             <a:r>
-              <a:t>- 纯词法换个说法就搜不到；纯向量对专有名词和编号不敏感。</a:t>
-            </a:r>
-          </a:p>
-          <a:p>
-            <a:r>
-              <a:t>- RRF 只看排名，不需要把两种分数归一化，工程上更稳。</a:t>
-            </a:r>
-          </a:p>
-          <a:p>
-            <a:r>
-              <a:t>- 重排用 LLM listwise，Top20 进、Top3 出；失败自动退回 RRF 顺序。</a:t>
-            </a:r>
-          </a:p>
-          <a:p>
-            <a:r>
-              <a:t>过渡：看这五步在真实数据上的参数。</a:t>
+              <a:t>- 切句是为了逐句核对，而不是整段糊过去。</a:t>
+            </a:r>
+          </a:p>
+          <a:p>
+            <a:r>
+              <a:t>- 数字对账容差 0.02 或 0.2%，编造的数字最容易被识破。</a:t>
+            </a:r>
+          </a:p>
+          <a:p>
+            <a:r>
+              <a:t>- 无出处标"推断"或删除；verify 返回 dropped 数量。</a:t>
+            </a:r>
+          </a:p>
+          <a:p>
+            <a:r>
+              <a:t>过渡：看真实回答里的引用长什么样。</a:t>
             </a:r>
           </a:p>
         </p:txBody>
@@ -1431,12 +1442,12 @@
           <a:lstStyle/>
           <a:p>
             <a:r>
-              <a:t>【RAG】检索参数</a:t>
-            </a:r>
-          </a:p>
-          <a:p>
-            <a:r>
-              <a:t>目的：用真实参数证明检索可解释、可调优。</a:t>
+              <a:t>【可信度】可溯源回答</a:t>
+            </a:r>
+          </a:p>
+          <a:p>
+            <a:r>
+              <a:t>目的：用截图证明引用可点、来源可查。</a:t>
             </a:r>
           </a:p>
           <a:p>
@@ -1446,22 +1457,22 @@
           </a:p>
           <a:p>
             <a:r>
-              <a:t>- 512 维中文嵌入，CPU 上 1,035 条约 30 秒建完。</a:t>
-            </a:r>
-          </a:p>
-          <a:p>
-            <a:r>
-              <a:t>- 30 路召回、RRF 取 20、重排输出 3，是延迟与质量的折中。</a:t>
-            </a:r>
-          </a:p>
-          <a:p>
-            <a:r>
-              <a:t>- 冷启动 9 秒是模型加载，热查询 0.9 秒；知识库页面会显示向量条数。</a:t>
-            </a:r>
-          </a:p>
-          <a:p>
-            <a:r>
-              <a:t>过渡：参数之外，还有两条硬规则：域路由和引用门槛。</a:t>
+              <a:t>- 正文里的 [FEAT-008] 和底部芯片是同一套 clause_id。</a:t>
+            </a:r>
+          </a:p>
+          <a:p>
+            <a:r>
+              <a:t>- 芯片标注来源级别：特征词典、NCI PDQ、指南。</a:t>
+            </a:r>
+          </a:p>
+          <a:p>
+            <a:r>
+              <a:t>- 没有依据的句子会被标"推断"或直接删掉。</a:t>
+            </a:r>
+          </a:p>
+          <a:p>
+            <a:r>
+              <a:t>过渡：进入知识库：这些条款从哪来。</a:t>
             </a:r>
           </a:p>
         </p:txBody>
@@ -1531,12 +1542,12 @@
           <a:lstStyle/>
           <a:p>
             <a:r>
-              <a:t>【RAG】检索规则</a:t>
-            </a:r>
-          </a:p>
-          <a:p>
-            <a:r>
-              <a:t>目的：解释引用质量靠规则，不靠 prompt 祈祷。</a:t>
+              <a:t>【过渡】章节页：知识库</a:t>
+            </a:r>
+          </a:p>
+          <a:p>
+            <a:r>
+              <a:t>目的：切到 RAG 部分。</a:t>
             </a:r>
           </a:p>
           <a:p>
@@ -1546,22 +1557,22 @@
           </a:p>
           <a:p>
             <a:r>
-              <a:t>- 域路由解决"系统文档抢医学问题排名"的问题。</a:t>
-            </a:r>
-          </a:p>
-          <a:p>
-            <a:r>
-              <a:t>- 引用门槛解决"检索到就挂上"的问题，分数不够就不引。</a:t>
-            </a:r>
-          </a:p>
-          <a:p>
-            <a:r>
-              <a:t>- 重排失败和向量失败都有降级路径，保证可用性。</a:t>
-            </a:r>
-          </a:p>
-          <a:p>
-            <a:r>
-              <a:t>过渡：看知识库页面实际怎么呈现这些条款。</a:t>
+              <a:t>- 上一部分解决"谁在说"，这一部分解决"依据从哪来"。</a:t>
+            </a:r>
+          </a:p>
+          <a:p>
+            <a:r>
+              <a:t>- 顺序是：语料构成 → 治理 → 索引 → 混合检索 → 引用规则。</a:t>
+            </a:r>
+          </a:p>
+          <a:p>
+            <a:r>
+              <a:t>- 还会给出三个问题的前后对比。</a:t>
+            </a:r>
+          </a:p>
+          <a:p>
+            <a:r>
+              <a:t>过渡：先看语料规模。</a:t>
             </a:r>
           </a:p>
         </p:txBody>
@@ -1636,7 +1647,7 @@
           </a:p>
           <a:p>
             <a:r>
-              <a:t>目的：把"模型准确率"叙事切换成"可解释、可追溯、可执行"。</a:t>
+              <a:t>目的：把"准确率"叙事换成三个角色各自的问题。</a:t>
             </a:r>
           </a:p>
           <a:p>
@@ -1646,22 +1657,22 @@
           </a:p>
           <a:p>
             <a:r>
-              <a:t>- 先承认模型本身不是壁垒：公开数据集、常见集成模型，谁都能训。</a:t>
-            </a:r>
-          </a:p>
-          <a:p>
-            <a:r>
-              <a:t>- 真正的难点是让医生和评委敢用：概率要有校准，结论要有依据，建议要能落地。</a:t>
-            </a:r>
-          </a:p>
-          <a:p>
-            <a:r>
-              <a:t>- 三个问题分别对应后面的校准、RAG 引用、Agent 工具调用。</a:t>
-            </a:r>
-          </a:p>
-          <a:p>
-            <a:r>
-              <a:t>过渡：进入系统总览，看这三件事分别落在哪一层。</a:t>
+              <a:t>- 医生关心依据，患者关心下一步，运营关心数据。三类问题不能用一个聊天框回答。</a:t>
+            </a:r>
+          </a:p>
+          <a:p>
+            <a:r>
+              <a:t>- 所以系统分成用户端 Agent、知识库、管理端三条线。</a:t>
+            </a:r>
+          </a:p>
+          <a:p>
+            <a:r>
+              <a:t>- 后面每一部分都对应其中一类问题。</a:t>
+            </a:r>
+          </a:p>
+          <a:p>
+            <a:r>
+              <a:t>过渡：先看整体分层。</a:t>
             </a:r>
           </a:p>
         </p:txBody>
@@ -1731,12 +1742,12 @@
           <a:lstStyle/>
           <a:p>
             <a:r>
-              <a:t>【产品】知识库页面</a:t>
-            </a:r>
-          </a:p>
-          <a:p>
-            <a:r>
-              <a:t>目的：展示知识库不是黑盒：用户能自己查、自己核对。</a:t>
+              <a:t>【RAG】语料构成</a:t>
+            </a:r>
+          </a:p>
+          <a:p>
+            <a:r>
+              <a:t>目的：给出规模与来源结构，说明权威性分层。</a:t>
             </a:r>
           </a:p>
           <a:p>
@@ -1746,22 +1757,22 @@
           </a:p>
           <a:p>
             <a:r>
-              <a:t>- 页面首屏服务端渲染 40 条，接口挂了也不会空白。</a:t>
-            </a:r>
-          </a:p>
-          <a:p>
-            <a:r>
-              <a:t>- 域标签和关键词过滤走服务端分页，页面只有 18KB。</a:t>
-            </a:r>
-          </a:p>
-          <a:p>
-            <a:r>
-              <a:t>- 混合检索按钮显示重排序号与相关度，方便解释"为什么是这条"。</a:t>
-            </a:r>
-          </a:p>
-          <a:p>
-            <a:r>
-              <a:t>过渡：用户端讲完，切到管理端与 Coze。</a:t>
+              <a:t>- NCI PDQ 是主力：治疗 487、筛查 212、预防 141。</a:t>
+            </a:r>
+          </a:p>
+          <a:p>
+            <a:r>
+              <a:t>- 中文来源包括 WHO、中国指南、NHS、MedlinePlus、维基。</a:t>
+            </a:r>
+          </a:p>
+          <a:p>
+            <a:r>
+              <a:t>- 特征词典、系统文档、FAQ 单独成域，避免和医学内容互相污染。</a:t>
+            </a:r>
+          </a:p>
+          <a:p>
+            <a:r>
+              <a:t>过渡：但有语料不等于能检索：治理前后差别很大。</a:t>
             </a:r>
           </a:p>
         </p:txBody>
@@ -1831,12 +1842,12 @@
           <a:lstStyle/>
           <a:p>
             <a:r>
-              <a:t>【运营】管理端</a:t>
-            </a:r>
-          </a:p>
-          <a:p>
-            <a:r>
-              <a:t>目的：说明管理端与用户端隔离，运营数据实时可看。</a:t>
+              <a:t>【RAG】语料治理</a:t>
+            </a:r>
+          </a:p>
+          <a:p>
+            <a:r>
+              <a:t>目的：说明"知识库乱"具体怎么修的。</a:t>
             </a:r>
           </a:p>
           <a:p>
@@ -1846,22 +1857,22 @@
           </a:p>
           <a:p>
             <a:r>
-              <a:t>- 管理端跑在 5001，Nginx 反代到 /console，和用户端不共享 session。</a:t>
-            </a:r>
-          </a:p>
-          <a:p>
-            <a:r>
-              <a:t>- JWT + bcrypt + 权限表，普通管理员看不到敏感操作。</a:t>
-            </a:r>
-          </a:p>
-          <a:p>
-            <a:r>
-              <a:t>- 看板数据来自真实数据库：310 次预测、18 个启用用户。</a:t>
-            </a:r>
-          </a:p>
-          <a:p>
-            <a:r>
-              <a:t>过渡：管理端里最特别的是 Coze 智能体。</a:t>
+              <a:t>- 之前按 1100 字硬切，一个章节切成 3–8 段，引用到"续 8"就丢上下文。</a:t>
+            </a:r>
+          </a:p>
+          <a:p>
+            <a:r>
+              <a:t>- 现在按句子边界切 260–900 字，噪声章节直接删，重复文本哈希去重。</a:t>
+            </a:r>
+          </a:p>
+          <a:p>
+            <a:r>
+              <a:t>- 补了副作用三源，因为之前问"化疗副作用"只能召回激素治疗。</a:t>
+            </a:r>
+          </a:p>
+          <a:p>
+            <a:r>
+              <a:t>过渡：治理完，看索引里到底存了什么。</a:t>
             </a:r>
           </a:p>
         </p:txBody>
@@ -1931,12 +1942,12 @@
           <a:lstStyle/>
           <a:p>
             <a:r>
-              <a:t>【运营】Coze 架构</a:t>
-            </a:r>
-          </a:p>
-          <a:p>
-            <a:r>
-              <a:t>目的：讲清 Coze 不是前端直连，而是服务端代理 + 自拼上下文。</a:t>
+              <a:t>【RAG】索引结构</a:t>
+            </a:r>
+          </a:p>
+          <a:p>
+            <a:r>
+              <a:t>目的：讲清索引表、规模和一次真实的 OOM 事故。</a:t>
             </a:r>
           </a:p>
           <a:p>
@@ -1946,22 +1957,22 @@
           </a:p>
           <a:p>
             <a:r>
-              <a:t>- PAT 只放在服务器环境变量，浏览器完全接触不到。</a:t>
-            </a:r>
-          </a:p>
-          <a:p>
-            <a:r>
-              <a:t>- 每次提问前把运营数据快照拼进 prompt：预测数、用户数、AI 会话数。</a:t>
-            </a:r>
-          </a:p>
-          <a:p>
-            <a:r>
-              <a:t>- Coze 失败时管理端仍可用，只影响智能体问答。</a:t>
-            </a:r>
-          </a:p>
-          <a:p>
-            <a:r>
-              <a:t>过渡：看真实 Coze 页面的运营数据。</a:t>
+              <a:t>- rag_chunks 存正文与元数据；rag_terms 是倒排；rag_vectors 存 512 维向量。</a:t>
+            </a:r>
+          </a:p>
+          <a:p>
+            <a:r>
+              <a:t>- 1,035 条向量不需要向量库，内存余弦足够，单次 &lt;5ms。</a:t>
+            </a:r>
+          </a:p>
+          <a:p>
+            <a:r>
+              <a:t>- 部署时现场构建曾 OOM，后来改成随包发布 4MB SQLite。</a:t>
+            </a:r>
+          </a:p>
+          <a:p>
+            <a:r>
+              <a:t>过渡：看检索怎么把对的条款捞出来。</a:t>
             </a:r>
           </a:p>
         </p:txBody>
@@ -2031,12 +2042,12 @@
           <a:lstStyle/>
           <a:p>
             <a:r>
-              <a:t>【运营】Coze 页面</a:t>
-            </a:r>
-          </a:p>
-          <a:p>
-            <a:r>
-              <a:t>目的：展示真实运营数据与流式对话，证明不是壳子。</a:t>
+              <a:t>【RAG】混合检索</a:t>
+            </a:r>
+          </a:p>
+          <a:p>
+            <a:r>
+              <a:t>目的：讲清每一路的作用、RRF 公式和降级链。</a:t>
             </a:r>
           </a:p>
           <a:p>
@@ -2046,22 +2057,22 @@
           </a:p>
           <a:p>
             <a:r>
-              <a:t>- 左侧数据是后台快照，每 60 秒刷新；Coze 回答基于这些数字。</a:t>
-            </a:r>
-          </a:p>
-          <a:p>
-            <a:r>
-              <a:t>- 对话走 SSE，前端逐字渲染；令牌仍只在服务端。</a:t>
-            </a:r>
-          </a:p>
-          <a:p>
-            <a:r>
-              <a:t>- Coze 定位是运营助手，不做医疗诊断，页面底部有免责声明。</a:t>
-            </a:r>
-          </a:p>
-          <a:p>
-            <a:r>
-              <a:t>过渡：最后讲部署与质量底线。</a:t>
+              <a:t>- 纯词法换个说法就搜不到；纯向量对编号和专有名词不敏感。</a:t>
+            </a:r>
+          </a:p>
+          <a:p>
+            <a:r>
+              <a:t>- RRF 只看排名，不需要分数归一化；k=60 是常用平滑值。</a:t>
+            </a:r>
+          </a:p>
+          <a:p>
+            <a:r>
+              <a:t>- 重排用 LLM Top20 进 Top3 出；失败自动退回 RRF，不阻断回答。</a:t>
+            </a:r>
+          </a:p>
+          <a:p>
+            <a:r>
+              <a:t>过渡：有了召回，还要决定哪些条款能进引用。</a:t>
             </a:r>
           </a:p>
         </p:txBody>
@@ -2131,12 +2142,12 @@
           <a:lstStyle/>
           <a:p>
             <a:r>
-              <a:t>【交付】部署与质量</a:t>
-            </a:r>
-          </a:p>
-          <a:p>
-            <a:r>
-              <a:t>目的：用数字回答"做完了吗、可靠吗"。</a:t>
+              <a:t>【RAG】引用规则</a:t>
+            </a:r>
+          </a:p>
+          <a:p>
+            <a:r>
+              <a:t>目的：解释域路由、门槛、重排和降级。</a:t>
             </a:r>
           </a:p>
           <a:p>
@@ -2146,22 +2157,22 @@
           </a:p>
           <a:p>
             <a:r>
-              <a:t>- 华为云 EulerOS + Nginx + systemd，GitHub Actions 一键部署。</a:t>
-            </a:r>
-          </a:p>
-          <a:p>
-            <a:r>
-              <a:t>- 向量随包发布，避免服务器内存不足导致部署中断（踩过 exit 137）。</a:t>
-            </a:r>
-          </a:p>
-          <a:p>
-            <a:r>
-              <a:t>- 73 个单测、20 条评测、63 项线上冒烟，全部在交付前跑过。</a:t>
-            </a:r>
-          </a:p>
-          <a:p>
-            <a:r>
-              <a:t>过渡：最后收束成三句话。</a:t>
+              <a:t>- 域路由解决"系统文档抢医学问题排名"的问题。</a:t>
+            </a:r>
+          </a:p>
+          <a:p>
+            <a:r>
+              <a:t>- 门槛解决"检索到就挂上"的问题，分数不够就不引。</a:t>
+            </a:r>
+          </a:p>
+          <a:p>
+            <a:r>
+              <a:t>- 重排和向量失败都有降级路径，保证可用性。</a:t>
+            </a:r>
+          </a:p>
+          <a:p>
+            <a:r>
+              <a:t>过渡：看三个真实问题的前后对比。</a:t>
             </a:r>
           </a:p>
         </p:txBody>
@@ -2231,12 +2242,12 @@
           <a:lstStyle/>
           <a:p>
             <a:r>
-              <a:t>【收束】收束</a:t>
-            </a:r>
-          </a:p>
-          <a:p>
-            <a:r>
-              <a:t>目的：把全场收束成三句话，留出提问空间。</a:t>
+              <a:t>【RAG】检索对比</a:t>
+            </a:r>
+          </a:p>
+          <a:p>
+            <a:r>
+              <a:t>目的：用三个具体问题展示修复前后的引用差异。</a:t>
             </a:r>
           </a:p>
           <a:p>
@@ -2246,27 +2257,422 @@
           </a:p>
           <a:p>
             <a:r>
-              <a:t>- 第一，过程可见：Agent 不是黑箱，节点和工具都能复述。</a:t>
-            </a:r>
-          </a:p>
-          <a:p>
-            <a:r>
-              <a:t>- 第二，结论可查：1,035 条条款 + 句子级绑定，引用能点开。</a:t>
-            </a:r>
-          </a:p>
-          <a:p>
-            <a:r>
-              <a:t>- 第三，边界清晰：弃权机制和 Coze 的运营定位，避免过度承诺。</a:t>
-            </a:r>
-          </a:p>
-          <a:p>
-            <a:r>
-              <a:t>过渡：致谢，进入提问。</a:t>
-            </a:r>
-          </a:p>
-          <a:p>
-            <a:r>
-              <a:t>提示：停顿 2 秒</a:t>
+              <a:t>- 副作用问题之前只能召回激素治疗，现在能命中副作用管理条款。</a:t>
+            </a:r>
+          </a:p>
+          <a:p>
+            <a:r>
+              <a:t>- 导出的问题之前召回"助手能做什么"，现在走策展 FAQ。</a:t>
+            </a:r>
+          </a:p>
+          <a:p>
+            <a:r>
+              <a:t>- 代价是冷启动 9 秒；热查询 0.9 秒，知识库页面有向量条数可核对。</a:t>
+            </a:r>
+          </a:p>
+          <a:p>
+            <a:r>
+              <a:t>过渡：看知识库页面实际怎么呈现。</a:t>
+            </a:r>
+          </a:p>
+        </p:txBody>
+      </p:sp>
+      <p:sp>
+        <p:nvSpPr>
+          <p:cNvPr id="4" name="Slide Number Placeholder 3"/>
+          <p:cNvSpPr>
+            <a:spLocks noGrp="1"/>
+          </p:cNvSpPr>
+          <p:nvPr>
+            <p:ph type="sldNum" idx="5" sz="quarter"/>
+          </p:nvPr>
+        </p:nvSpPr>
+        <p:spPr/>
+      </p:sp>
+    </p:spTree>
+  </p:cSld>
+  <p:clrMapOvr>
+    <a:masterClrMapping/>
+  </p:clrMapOvr>
+</p:notes>
+</file>
+
+<file path=ppt/notesSlides/notesSlide26.xml><?xml version="1.0" encoding="utf-8"?>
+<p:notes xmlns:a="http://schemas.openxmlformats.org/drawingml/2006/main" xmlns:p="http://schemas.openxmlformats.org/presentationml/2006/main" xmlns:r="http://schemas.openxmlformats.org/officeDocument/2006/relationships">
+  <p:cSld>
+    <p:spTree>
+      <p:nvGrpSpPr>
+        <p:cNvPr id="1" name=""/>
+        <p:cNvGrpSpPr/>
+        <p:nvPr/>
+      </p:nvGrpSpPr>
+      <p:grpSpPr>
+        <a:xfrm>
+          <a:off x="0" y="0"/>
+          <a:ext cx="0" cy="0"/>
+          <a:chOff x="0" y="0"/>
+          <a:chExt cx="0" cy="0"/>
+        </a:xfrm>
+      </p:grpSpPr>
+      <p:sp>
+        <p:nvSpPr>
+          <p:cNvPr id="2" name="Slide Image Placeholder 1"/>
+          <p:cNvSpPr>
+            <a:spLocks noGrp="1"/>
+          </p:cNvSpPr>
+          <p:nvPr>
+            <p:ph type="sldImg" idx="2"/>
+          </p:nvPr>
+        </p:nvSpPr>
+        <p:spPr/>
+      </p:sp>
+      <p:sp>
+        <p:nvSpPr>
+          <p:cNvPr id="3" name="Notes Placeholder 2"/>
+          <p:cNvSpPr>
+            <a:spLocks noGrp="1"/>
+          </p:cNvSpPr>
+          <p:nvPr>
+            <p:ph type="body" idx="3" sz="quarter"/>
+          </p:nvPr>
+        </p:nvSpPr>
+        <p:spPr/>
+        <p:txBody>
+          <a:bodyPr/>
+          <a:lstStyle/>
+          <a:p>
+            <a:r>
+              <a:t>【产品】知识库页面</a:t>
+            </a:r>
+          </a:p>
+          <a:p>
+            <a:r>
+              <a:t>目的：展示知识库不是黑盒：用户能自己查、自己核对。</a:t>
+            </a:r>
+          </a:p>
+          <a:p>
+            <a:r>
+              <a:t>讲述要点：</a:t>
+            </a:r>
+          </a:p>
+          <a:p>
+            <a:r>
+              <a:t>- 首屏服务端渲染 40 条，接口挂了也不会空白。</a:t>
+            </a:r>
+          </a:p>
+          <a:p>
+            <a:r>
+              <a:t>- 域标签和关键词过滤走服务端分页，页面只有 18KB。</a:t>
+            </a:r>
+          </a:p>
+          <a:p>
+            <a:r>
+              <a:t>- 混合检索按钮显示重排序号与相关度。</a:t>
+            </a:r>
+          </a:p>
+          <a:p>
+            <a:r>
+              <a:t>过渡：用户端讲完，切到管理端与 Coze。</a:t>
+            </a:r>
+          </a:p>
+        </p:txBody>
+      </p:sp>
+      <p:sp>
+        <p:nvSpPr>
+          <p:cNvPr id="4" name="Slide Number Placeholder 3"/>
+          <p:cNvSpPr>
+            <a:spLocks noGrp="1"/>
+          </p:cNvSpPr>
+          <p:nvPr>
+            <p:ph type="sldNum" idx="5" sz="quarter"/>
+          </p:nvPr>
+        </p:nvSpPr>
+        <p:spPr/>
+      </p:sp>
+    </p:spTree>
+  </p:cSld>
+  <p:clrMapOvr>
+    <a:masterClrMapping/>
+  </p:clrMapOvr>
+</p:notes>
+</file>
+
+<file path=ppt/notesSlides/notesSlide27.xml><?xml version="1.0" encoding="utf-8"?>
+<p:notes xmlns:a="http://schemas.openxmlformats.org/drawingml/2006/main" xmlns:p="http://schemas.openxmlformats.org/presentationml/2006/main" xmlns:r="http://schemas.openxmlformats.org/officeDocument/2006/relationships">
+  <p:cSld>
+    <p:spTree>
+      <p:nvGrpSpPr>
+        <p:cNvPr id="1" name=""/>
+        <p:cNvGrpSpPr/>
+        <p:nvPr/>
+      </p:nvGrpSpPr>
+      <p:grpSpPr>
+        <a:xfrm>
+          <a:off x="0" y="0"/>
+          <a:ext cx="0" cy="0"/>
+          <a:chOff x="0" y="0"/>
+          <a:chExt cx="0" cy="0"/>
+        </a:xfrm>
+      </p:grpSpPr>
+      <p:sp>
+        <p:nvSpPr>
+          <p:cNvPr id="2" name="Slide Image Placeholder 1"/>
+          <p:cNvSpPr>
+            <a:spLocks noGrp="1"/>
+          </p:cNvSpPr>
+          <p:nvPr>
+            <p:ph type="sldImg" idx="2"/>
+          </p:nvPr>
+        </p:nvSpPr>
+        <p:spPr/>
+      </p:sp>
+      <p:sp>
+        <p:nvSpPr>
+          <p:cNvPr id="3" name="Notes Placeholder 2"/>
+          <p:cNvSpPr>
+            <a:spLocks noGrp="1"/>
+          </p:cNvSpPr>
+          <p:nvPr>
+            <p:ph type="body" idx="3" sz="quarter"/>
+          </p:nvPr>
+        </p:nvSpPr>
+        <p:spPr/>
+        <p:txBody>
+          <a:bodyPr/>
+          <a:lstStyle/>
+          <a:p>
+            <a:r>
+              <a:t>【过渡】章节页：运营</a:t>
+            </a:r>
+          </a:p>
+          <a:p>
+            <a:r>
+              <a:t>目的：切到管理端与工程交付。</a:t>
+            </a:r>
+          </a:p>
+          <a:p>
+            <a:r>
+              <a:t>讲述要点：</a:t>
+            </a:r>
+          </a:p>
+          <a:p>
+            <a:r>
+              <a:t>- 最后一部分回答：系统怎么运营、质量怎么保证、边界在哪。</a:t>
+            </a:r>
+          </a:p>
+          <a:p>
+            <a:r>
+              <a:t>- 管理端与 Coze 是旁路，不进入诊断链路。</a:t>
+            </a:r>
+          </a:p>
+          <a:p>
+            <a:r>
+              <a:t>- 最后会主动讲局限，而不是只讲成绩。</a:t>
+            </a:r>
+          </a:p>
+          <a:p>
+            <a:r>
+              <a:t>过渡：先看管理端。</a:t>
+            </a:r>
+          </a:p>
+        </p:txBody>
+      </p:sp>
+      <p:sp>
+        <p:nvSpPr>
+          <p:cNvPr id="4" name="Slide Number Placeholder 3"/>
+          <p:cNvSpPr>
+            <a:spLocks noGrp="1"/>
+          </p:cNvSpPr>
+          <p:nvPr>
+            <p:ph type="sldNum" idx="5" sz="quarter"/>
+          </p:nvPr>
+        </p:nvSpPr>
+        <p:spPr/>
+      </p:sp>
+    </p:spTree>
+  </p:cSld>
+  <p:clrMapOvr>
+    <a:masterClrMapping/>
+  </p:clrMapOvr>
+</p:notes>
+</file>
+
+<file path=ppt/notesSlides/notesSlide28.xml><?xml version="1.0" encoding="utf-8"?>
+<p:notes xmlns:a="http://schemas.openxmlformats.org/drawingml/2006/main" xmlns:p="http://schemas.openxmlformats.org/presentationml/2006/main" xmlns:r="http://schemas.openxmlformats.org/officeDocument/2006/relationships">
+  <p:cSld>
+    <p:spTree>
+      <p:nvGrpSpPr>
+        <p:cNvPr id="1" name=""/>
+        <p:cNvGrpSpPr/>
+        <p:nvPr/>
+      </p:nvGrpSpPr>
+      <p:grpSpPr>
+        <a:xfrm>
+          <a:off x="0" y="0"/>
+          <a:ext cx="0" cy="0"/>
+          <a:chOff x="0" y="0"/>
+          <a:chExt cx="0" cy="0"/>
+        </a:xfrm>
+      </p:grpSpPr>
+      <p:sp>
+        <p:nvSpPr>
+          <p:cNvPr id="2" name="Slide Image Placeholder 1"/>
+          <p:cNvSpPr>
+            <a:spLocks noGrp="1"/>
+          </p:cNvSpPr>
+          <p:nvPr>
+            <p:ph type="sldImg" idx="2"/>
+          </p:nvPr>
+        </p:nvSpPr>
+        <p:spPr/>
+      </p:sp>
+      <p:sp>
+        <p:nvSpPr>
+          <p:cNvPr id="3" name="Notes Placeholder 2"/>
+          <p:cNvSpPr>
+            <a:spLocks noGrp="1"/>
+          </p:cNvSpPr>
+          <p:nvPr>
+            <p:ph type="body" idx="3" sz="quarter"/>
+          </p:nvPr>
+        </p:nvSpPr>
+        <p:spPr/>
+        <p:txBody>
+          <a:bodyPr/>
+          <a:lstStyle/>
+          <a:p>
+            <a:r>
+              <a:t>【运营】管理端</a:t>
+            </a:r>
+          </a:p>
+          <a:p>
+            <a:r>
+              <a:t>目的：说明管理端与用户端隔离，运营数据实时可看。</a:t>
+            </a:r>
+          </a:p>
+          <a:p>
+            <a:r>
+              <a:t>讲述要点：</a:t>
+            </a:r>
+          </a:p>
+          <a:p>
+            <a:r>
+              <a:t>- 管理端跑在 5001，Nginx 反代到 /console，不共享 session。</a:t>
+            </a:r>
+          </a:p>
+          <a:p>
+            <a:r>
+              <a:t>- JWT + bcrypt + 权限表，普通管理员看不到敏感操作。</a:t>
+            </a:r>
+          </a:p>
+          <a:p>
+            <a:r>
+              <a:t>- 看板数据来自真实数据库：310 次预测、18 个启用用户。</a:t>
+            </a:r>
+          </a:p>
+          <a:p>
+            <a:r>
+              <a:t>过渡：管理端里最特别的是 Coze。</a:t>
+            </a:r>
+          </a:p>
+        </p:txBody>
+      </p:sp>
+      <p:sp>
+        <p:nvSpPr>
+          <p:cNvPr id="4" name="Slide Number Placeholder 3"/>
+          <p:cNvSpPr>
+            <a:spLocks noGrp="1"/>
+          </p:cNvSpPr>
+          <p:nvPr>
+            <p:ph type="sldNum" idx="5" sz="quarter"/>
+          </p:nvPr>
+        </p:nvSpPr>
+        <p:spPr/>
+      </p:sp>
+    </p:spTree>
+  </p:cSld>
+  <p:clrMapOvr>
+    <a:masterClrMapping/>
+  </p:clrMapOvr>
+</p:notes>
+</file>
+
+<file path=ppt/notesSlides/notesSlide29.xml><?xml version="1.0" encoding="utf-8"?>
+<p:notes xmlns:a="http://schemas.openxmlformats.org/drawingml/2006/main" xmlns:p="http://schemas.openxmlformats.org/presentationml/2006/main" xmlns:r="http://schemas.openxmlformats.org/officeDocument/2006/relationships">
+  <p:cSld>
+    <p:spTree>
+      <p:nvGrpSpPr>
+        <p:cNvPr id="1" name=""/>
+        <p:cNvGrpSpPr/>
+        <p:nvPr/>
+      </p:nvGrpSpPr>
+      <p:grpSpPr>
+        <a:xfrm>
+          <a:off x="0" y="0"/>
+          <a:ext cx="0" cy="0"/>
+          <a:chOff x="0" y="0"/>
+          <a:chExt cx="0" cy="0"/>
+        </a:xfrm>
+      </p:grpSpPr>
+      <p:sp>
+        <p:nvSpPr>
+          <p:cNvPr id="2" name="Slide Image Placeholder 1"/>
+          <p:cNvSpPr>
+            <a:spLocks noGrp="1"/>
+          </p:cNvSpPr>
+          <p:nvPr>
+            <p:ph type="sldImg" idx="2"/>
+          </p:nvPr>
+        </p:nvSpPr>
+        <p:spPr/>
+      </p:sp>
+      <p:sp>
+        <p:nvSpPr>
+          <p:cNvPr id="3" name="Notes Placeholder 2"/>
+          <p:cNvSpPr>
+            <a:spLocks noGrp="1"/>
+          </p:cNvSpPr>
+          <p:nvPr>
+            <p:ph type="body" idx="3" sz="quarter"/>
+          </p:nvPr>
+        </p:nvSpPr>
+        <p:spPr/>
+        <p:txBody>
+          <a:bodyPr/>
+          <a:lstStyle/>
+          <a:p>
+            <a:r>
+              <a:t>【运营】Coze 架构</a:t>
+            </a:r>
+          </a:p>
+          <a:p>
+            <a:r>
+              <a:t>目的：讲清代理、上下文和失败边界。</a:t>
+            </a:r>
+          </a:p>
+          <a:p>
+            <a:r>
+              <a:t>讲述要点：</a:t>
+            </a:r>
+          </a:p>
+          <a:p>
+            <a:r>
+              <a:t>- PAT 只在服务器环境变量，浏览器完全接触不到。</a:t>
+            </a:r>
+          </a:p>
+          <a:p>
+            <a:r>
+              <a:t>- 每次提问前从 SQLite 取快照：用户、预测、模型、AI 会话，拼进 prompt。</a:t>
+            </a:r>
+          </a:p>
+          <a:p>
+            <a:r>
+              <a:t>- Coze 失败时管理端仍可用，只影响智能体问答。</a:t>
+            </a:r>
+          </a:p>
+          <a:p>
+            <a:r>
+              <a:t>过渡：看真实 Coze 页面。</a:t>
             </a:r>
           </a:p>
         </p:txBody>
@@ -2336,12 +2742,12 @@
           <a:lstStyle/>
           <a:p>
             <a:r>
-              <a:t>【架构】系统总览</a:t>
-            </a:r>
-          </a:p>
-          <a:p>
-            <a:r>
-              <a:t>目的：建立全局心智模型：三层 + 管理端旁路。</a:t>
+              <a:t>【架构】系统分层</a:t>
+            </a:r>
+          </a:p>
+          <a:p>
+            <a:r>
+              <a:t>目的：建立全局模型：两层进程、三层职责。</a:t>
             </a:r>
           </a:p>
           <a:p>
@@ -2351,22 +2757,727 @@
           </a:p>
           <a:p>
             <a:r>
-              <a:t>- 交互层是 Flask 渲染页面和 SSE 流；编排层是自研 Graph，不依赖 LangChain。</a:t>
-            </a:r>
-          </a:p>
-          <a:p>
-            <a:r>
-              <a:t>- 证据层包含模型、校准、RAG 和 SQLite；管理端单独 5001 端口，不阻塞用户请求。</a:t>
-            </a:r>
-          </a:p>
-          <a:p>
-            <a:r>
-              <a:t>- 强调管理端是旁路：即使 Coze 挂了，用户端预测和问答仍然可用。</a:t>
-            </a:r>
-          </a:p>
-          <a:p>
-            <a:r>
-              <a:t>过渡：先看用户端最基础的一条链路：一次预测。</a:t>
+              <a:t>- 用户端 5000 端口，管理端 5001；Nginx 统一入口，/console 反代到管理端。</a:t>
+            </a:r>
+          </a:p>
+          <a:p>
+            <a:r>
+              <a:t>- 编排层是自研 Graph，不依赖 LangChain；节点和边显式声明。</a:t>
+            </a:r>
+          </a:p>
+          <a:p>
+            <a:r>
+              <a:t>- 证据层包含模型、RAG 和 SQLite，共 18 张表。</a:t>
+            </a:r>
+          </a:p>
+          <a:p>
+            <a:r>
+              <a:t>过渡：先看模型这一层怎么跑。</a:t>
+            </a:r>
+          </a:p>
+        </p:txBody>
+      </p:sp>
+      <p:sp>
+        <p:nvSpPr>
+          <p:cNvPr id="4" name="Slide Number Placeholder 3"/>
+          <p:cNvSpPr>
+            <a:spLocks noGrp="1"/>
+          </p:cNvSpPr>
+          <p:nvPr>
+            <p:ph type="sldNum" idx="5" sz="quarter"/>
+          </p:nvPr>
+        </p:nvSpPr>
+        <p:spPr/>
+      </p:sp>
+    </p:spTree>
+  </p:cSld>
+  <p:clrMapOvr>
+    <a:masterClrMapping/>
+  </p:clrMapOvr>
+</p:notes>
+</file>
+
+<file path=ppt/notesSlides/notesSlide30.xml><?xml version="1.0" encoding="utf-8"?>
+<p:notes xmlns:a="http://schemas.openxmlformats.org/drawingml/2006/main" xmlns:p="http://schemas.openxmlformats.org/presentationml/2006/main" xmlns:r="http://schemas.openxmlformats.org/officeDocument/2006/relationships">
+  <p:cSld>
+    <p:spTree>
+      <p:nvGrpSpPr>
+        <p:cNvPr id="1" name=""/>
+        <p:cNvGrpSpPr/>
+        <p:nvPr/>
+      </p:nvGrpSpPr>
+      <p:grpSpPr>
+        <a:xfrm>
+          <a:off x="0" y="0"/>
+          <a:ext cx="0" cy="0"/>
+          <a:chOff x="0" y="0"/>
+          <a:chExt cx="0" cy="0"/>
+        </a:xfrm>
+      </p:grpSpPr>
+      <p:sp>
+        <p:nvSpPr>
+          <p:cNvPr id="2" name="Slide Image Placeholder 1"/>
+          <p:cNvSpPr>
+            <a:spLocks noGrp="1"/>
+          </p:cNvSpPr>
+          <p:nvPr>
+            <p:ph type="sldImg" idx="2"/>
+          </p:nvPr>
+        </p:nvSpPr>
+        <p:spPr/>
+      </p:sp>
+      <p:sp>
+        <p:nvSpPr>
+          <p:cNvPr id="3" name="Notes Placeholder 2"/>
+          <p:cNvSpPr>
+            <a:spLocks noGrp="1"/>
+          </p:cNvSpPr>
+          <p:nvPr>
+            <p:ph type="body" idx="3" sz="quarter"/>
+          </p:nvPr>
+        </p:nvSpPr>
+        <p:spPr/>
+        <p:txBody>
+          <a:bodyPr/>
+          <a:lstStyle/>
+          <a:p>
+            <a:r>
+              <a:t>【运营】Coze 页面</a:t>
+            </a:r>
+          </a:p>
+          <a:p>
+            <a:r>
+              <a:t>目的：展示真实运营数据与流式对话。</a:t>
+            </a:r>
+          </a:p>
+          <a:p>
+            <a:r>
+              <a:t>讲述要点：</a:t>
+            </a:r>
+          </a:p>
+          <a:p>
+            <a:r>
+              <a:t>- 左侧数据每 60 秒刷新；Coze 回答基于这些数字。</a:t>
+            </a:r>
+          </a:p>
+          <a:p>
+            <a:r>
+              <a:t>- 对话走 SSE，前端逐字渲染；令牌仍只在服务端。</a:t>
+            </a:r>
+          </a:p>
+          <a:p>
+            <a:r>
+              <a:t>- 定位是运营助手，页面底部有"不构成医疗诊断"声明。</a:t>
+            </a:r>
+          </a:p>
+          <a:p>
+            <a:r>
+              <a:t>过渡：Coze 的边界要说清楚。</a:t>
+            </a:r>
+          </a:p>
+        </p:txBody>
+      </p:sp>
+      <p:sp>
+        <p:nvSpPr>
+          <p:cNvPr id="4" name="Slide Number Placeholder 3"/>
+          <p:cNvSpPr>
+            <a:spLocks noGrp="1"/>
+          </p:cNvSpPr>
+          <p:nvPr>
+            <p:ph type="sldNum" idx="5" sz="quarter"/>
+          </p:nvPr>
+        </p:nvSpPr>
+        <p:spPr/>
+      </p:sp>
+    </p:spTree>
+  </p:cSld>
+  <p:clrMapOvr>
+    <a:masterClrMapping/>
+  </p:clrMapOvr>
+</p:notes>
+</file>
+
+<file path=ppt/notesSlides/notesSlide31.xml><?xml version="1.0" encoding="utf-8"?>
+<p:notes xmlns:a="http://schemas.openxmlformats.org/drawingml/2006/main" xmlns:p="http://schemas.openxmlformats.org/presentationml/2006/main" xmlns:r="http://schemas.openxmlformats.org/officeDocument/2006/relationships">
+  <p:cSld>
+    <p:spTree>
+      <p:nvGrpSpPr>
+        <p:cNvPr id="1" name=""/>
+        <p:cNvGrpSpPr/>
+        <p:nvPr/>
+      </p:nvGrpSpPr>
+      <p:grpSpPr>
+        <a:xfrm>
+          <a:off x="0" y="0"/>
+          <a:ext cx="0" cy="0"/>
+          <a:chOff x="0" y="0"/>
+          <a:chExt cx="0" cy="0"/>
+        </a:xfrm>
+      </p:grpSpPr>
+      <p:sp>
+        <p:nvSpPr>
+          <p:cNvPr id="2" name="Slide Image Placeholder 1"/>
+          <p:cNvSpPr>
+            <a:spLocks noGrp="1"/>
+          </p:cNvSpPr>
+          <p:nvPr>
+            <p:ph type="sldImg" idx="2"/>
+          </p:nvPr>
+        </p:nvSpPr>
+        <p:spPr/>
+      </p:sp>
+      <p:sp>
+        <p:nvSpPr>
+          <p:cNvPr id="3" name="Notes Placeholder 2"/>
+          <p:cNvSpPr>
+            <a:spLocks noGrp="1"/>
+          </p:cNvSpPr>
+          <p:nvPr>
+            <p:ph type="body" idx="3" sz="quarter"/>
+          </p:nvPr>
+        </p:nvSpPr>
+        <p:spPr/>
+        <p:txBody>
+          <a:bodyPr/>
+          <a:lstStyle/>
+          <a:p>
+            <a:r>
+              <a:t>【运营】Coze 边界</a:t>
+            </a:r>
+          </a:p>
+          <a:p>
+            <a:r>
+              <a:t>目的：主动划清 Coze 的能力边界。</a:t>
+            </a:r>
+          </a:p>
+          <a:p>
+            <a:r>
+              <a:t>讲述要点：</a:t>
+            </a:r>
+          </a:p>
+          <a:p>
+            <a:r>
+              <a:t>- Coze 只读运营数据：预测数、用户数、模型指标、AI 会话。</a:t>
+            </a:r>
+          </a:p>
+          <a:p>
+            <a:r>
+              <a:t>- 不接患者级数据、不做诊断、不开处方；页面有免责声明。</a:t>
+            </a:r>
+          </a:p>
+          <a:p>
+            <a:r>
+              <a:t>- 用户端的拒答与三档不确定性不依赖 Coze，Coze 挂了也不影响诊断链路。</a:t>
+            </a:r>
+          </a:p>
+          <a:p>
+            <a:r>
+              <a:t>过渡：最后讲工程质量与取舍。</a:t>
+            </a:r>
+          </a:p>
+        </p:txBody>
+      </p:sp>
+      <p:sp>
+        <p:nvSpPr>
+          <p:cNvPr id="4" name="Slide Number Placeholder 3"/>
+          <p:cNvSpPr>
+            <a:spLocks noGrp="1"/>
+          </p:cNvSpPr>
+          <p:nvPr>
+            <p:ph type="sldNum" idx="5" sz="quarter"/>
+          </p:nvPr>
+        </p:nvSpPr>
+        <p:spPr/>
+      </p:sp>
+    </p:spTree>
+  </p:cSld>
+  <p:clrMapOvr>
+    <a:masterClrMapping/>
+  </p:clrMapOvr>
+</p:notes>
+</file>
+
+<file path=ppt/notesSlides/notesSlide32.xml><?xml version="1.0" encoding="utf-8"?>
+<p:notes xmlns:a="http://schemas.openxmlformats.org/drawingml/2006/main" xmlns:p="http://schemas.openxmlformats.org/presentationml/2006/main" xmlns:r="http://schemas.openxmlformats.org/officeDocument/2006/relationships">
+  <p:cSld>
+    <p:spTree>
+      <p:nvGrpSpPr>
+        <p:cNvPr id="1" name=""/>
+        <p:cNvGrpSpPr/>
+        <p:nvPr/>
+      </p:nvGrpSpPr>
+      <p:grpSpPr>
+        <a:xfrm>
+          <a:off x="0" y="0"/>
+          <a:ext cx="0" cy="0"/>
+          <a:chOff x="0" y="0"/>
+          <a:chExt cx="0" cy="0"/>
+        </a:xfrm>
+      </p:grpSpPr>
+      <p:sp>
+        <p:nvSpPr>
+          <p:cNvPr id="2" name="Slide Image Placeholder 1"/>
+          <p:cNvSpPr>
+            <a:spLocks noGrp="1"/>
+          </p:cNvSpPr>
+          <p:nvPr>
+            <p:ph type="sldImg" idx="2"/>
+          </p:nvPr>
+        </p:nvSpPr>
+        <p:spPr/>
+      </p:sp>
+      <p:sp>
+        <p:nvSpPr>
+          <p:cNvPr id="3" name="Notes Placeholder 2"/>
+          <p:cNvSpPr>
+            <a:spLocks noGrp="1"/>
+          </p:cNvSpPr>
+          <p:nvPr>
+            <p:ph type="body" idx="3" sz="quarter"/>
+          </p:nvPr>
+        </p:nvSpPr>
+        <p:spPr/>
+        <p:txBody>
+          <a:bodyPr/>
+          <a:lstStyle/>
+          <a:p>
+            <a:r>
+              <a:t>【交付】工程质量</a:t>
+            </a:r>
+          </a:p>
+          <a:p>
+            <a:r>
+              <a:t>目的：用数字回答"可靠吗、能复现吗"。</a:t>
+            </a:r>
+          </a:p>
+          <a:p>
+            <a:r>
+              <a:t>讲述要点：</a:t>
+            </a:r>
+          </a:p>
+          <a:p>
+            <a:r>
+              <a:t>- 73 个单测、20 条评测、63 项冒烟，交付前全部跑过。</a:t>
+            </a:r>
+          </a:p>
+          <a:p>
+            <a:r>
+              <a:t>- 部署约 60 秒；索引重建、重启、自检都在流水线里。</a:t>
+            </a:r>
+          </a:p>
+          <a:p>
+            <a:r>
+              <a:t>- 向量随包发布，避免服务器内存不足导致部署中断。</a:t>
+            </a:r>
+          </a:p>
+          <a:p>
+            <a:r>
+              <a:t>过渡：看评测指标本身。</a:t>
+            </a:r>
+          </a:p>
+        </p:txBody>
+      </p:sp>
+      <p:sp>
+        <p:nvSpPr>
+          <p:cNvPr id="4" name="Slide Number Placeholder 3"/>
+          <p:cNvSpPr>
+            <a:spLocks noGrp="1"/>
+          </p:cNvSpPr>
+          <p:nvPr>
+            <p:ph type="sldNum" idx="5" sz="quarter"/>
+          </p:nvPr>
+        </p:nvSpPr>
+        <p:spPr/>
+      </p:sp>
+    </p:spTree>
+  </p:cSld>
+  <p:clrMapOvr>
+    <a:masterClrMapping/>
+  </p:clrMapOvr>
+</p:notes>
+</file>
+
+<file path=ppt/notesSlides/notesSlide33.xml><?xml version="1.0" encoding="utf-8"?>
+<p:notes xmlns:a="http://schemas.openxmlformats.org/drawingml/2006/main" xmlns:p="http://schemas.openxmlformats.org/presentationml/2006/main" xmlns:r="http://schemas.openxmlformats.org/officeDocument/2006/relationships">
+  <p:cSld>
+    <p:spTree>
+      <p:nvGrpSpPr>
+        <p:cNvPr id="1" name=""/>
+        <p:cNvGrpSpPr/>
+        <p:nvPr/>
+      </p:nvGrpSpPr>
+      <p:grpSpPr>
+        <a:xfrm>
+          <a:off x="0" y="0"/>
+          <a:ext cx="0" cy="0"/>
+          <a:chOff x="0" y="0"/>
+          <a:chExt cx="0" cy="0"/>
+        </a:xfrm>
+      </p:grpSpPr>
+      <p:sp>
+        <p:nvSpPr>
+          <p:cNvPr id="2" name="Slide Image Placeholder 1"/>
+          <p:cNvSpPr>
+            <a:spLocks noGrp="1"/>
+          </p:cNvSpPr>
+          <p:nvPr>
+            <p:ph type="sldImg" idx="2"/>
+          </p:nvPr>
+        </p:nvSpPr>
+        <p:spPr/>
+      </p:sp>
+      <p:sp>
+        <p:nvSpPr>
+          <p:cNvPr id="3" name="Notes Placeholder 2"/>
+          <p:cNvSpPr>
+            <a:spLocks noGrp="1"/>
+          </p:cNvSpPr>
+          <p:nvPr>
+            <p:ph type="body" idx="3" sz="quarter"/>
+          </p:nvPr>
+        </p:nvSpPr>
+        <p:spPr/>
+        <p:txBody>
+          <a:bodyPr/>
+          <a:lstStyle/>
+          <a:p>
+            <a:r>
+              <a:t>【交付】评测结果</a:t>
+            </a:r>
+          </a:p>
+          <a:p>
+            <a:r>
+              <a:t>目的：给出评测指标，同时说明它覆盖不到什么。</a:t>
+            </a:r>
+          </a:p>
+          <a:p>
+            <a:r>
+              <a:t>讲述要点：</a:t>
+            </a:r>
+          </a:p>
+          <a:p>
+            <a:r>
+              <a:t>- 意图、引用、拒答、升级、对账、延迟六项全部达标。</a:t>
+            </a:r>
+          </a:p>
+          <a:p>
+            <a:r>
+              <a:t>- p95 221ms 是离线确定性路径；LLM 路径会慢很多。</a:t>
+            </a:r>
+          </a:p>
+          <a:p>
+            <a:r>
+              <a:t>- 评测不覆盖自由生成质量，这是局限，后面会讲。</a:t>
+            </a:r>
+          </a:p>
+          <a:p>
+            <a:r>
+              <a:t>过渡：最后讲取舍与局限。</a:t>
+            </a:r>
+          </a:p>
+        </p:txBody>
+      </p:sp>
+      <p:sp>
+        <p:nvSpPr>
+          <p:cNvPr id="4" name="Slide Number Placeholder 3"/>
+          <p:cNvSpPr>
+            <a:spLocks noGrp="1"/>
+          </p:cNvSpPr>
+          <p:nvPr>
+            <p:ph type="sldNum" idx="5" sz="quarter"/>
+          </p:nvPr>
+        </p:nvSpPr>
+        <p:spPr/>
+      </p:sp>
+    </p:spTree>
+  </p:cSld>
+  <p:clrMapOvr>
+    <a:masterClrMapping/>
+  </p:clrMapOvr>
+</p:notes>
+</file>
+
+<file path=ppt/notesSlides/notesSlide34.xml><?xml version="1.0" encoding="utf-8"?>
+<p:notes xmlns:a="http://schemas.openxmlformats.org/drawingml/2006/main" xmlns:p="http://schemas.openxmlformats.org/presentationml/2006/main" xmlns:r="http://schemas.openxmlformats.org/officeDocument/2006/relationships">
+  <p:cSld>
+    <p:spTree>
+      <p:nvGrpSpPr>
+        <p:cNvPr id="1" name=""/>
+        <p:cNvGrpSpPr/>
+        <p:nvPr/>
+      </p:nvGrpSpPr>
+      <p:grpSpPr>
+        <a:xfrm>
+          <a:off x="0" y="0"/>
+          <a:ext cx="0" cy="0"/>
+          <a:chOff x="0" y="0"/>
+          <a:chExt cx="0" cy="0"/>
+        </a:xfrm>
+      </p:grpSpPr>
+      <p:sp>
+        <p:nvSpPr>
+          <p:cNvPr id="2" name="Slide Image Placeholder 1"/>
+          <p:cNvSpPr>
+            <a:spLocks noGrp="1"/>
+          </p:cNvSpPr>
+          <p:nvPr>
+            <p:ph type="sldImg" idx="2"/>
+          </p:nvPr>
+        </p:nvSpPr>
+        <p:spPr/>
+      </p:sp>
+      <p:sp>
+        <p:nvSpPr>
+          <p:cNvPr id="3" name="Notes Placeholder 2"/>
+          <p:cNvSpPr>
+            <a:spLocks noGrp="1"/>
+          </p:cNvSpPr>
+          <p:nvPr>
+            <p:ph type="body" idx="3" sz="quarter"/>
+          </p:nvPr>
+        </p:nvSpPr>
+        <p:spPr/>
+        <p:txBody>
+          <a:bodyPr/>
+          <a:lstStyle/>
+          <a:p>
+            <a:r>
+              <a:t>【取舍】关键取舍</a:t>
+            </a:r>
+          </a:p>
+          <a:p>
+            <a:r>
+              <a:t>目的：讲四个技术选择的收益与代价。</a:t>
+            </a:r>
+          </a:p>
+          <a:p>
+            <a:r>
+              <a:t>讲述要点：</a:t>
+            </a:r>
+          </a:p>
+          <a:p>
+            <a:r>
+              <a:t>- 自研 Graph 换来可控和可测，代价是生态能力要自己补。</a:t>
+            </a:r>
+          </a:p>
+          <a:p>
+            <a:r>
+              <a:t>- 词法 + 向量换来召回，代价是模型体积和冷启动。</a:t>
+            </a:r>
+          </a:p>
+          <a:p>
+            <a:r>
+              <a:t>- SQLite 换来部署简单，代价是并发和规模上限；单 worker 也是同样的取舍。</a:t>
+            </a:r>
+          </a:p>
+          <a:p>
+            <a:r>
+              <a:t>过渡：这些代价带来什么局限。</a:t>
+            </a:r>
+          </a:p>
+        </p:txBody>
+      </p:sp>
+      <p:sp>
+        <p:nvSpPr>
+          <p:cNvPr id="4" name="Slide Number Placeholder 3"/>
+          <p:cNvSpPr>
+            <a:spLocks noGrp="1"/>
+          </p:cNvSpPr>
+          <p:nvPr>
+            <p:ph type="sldNum" idx="5" sz="quarter"/>
+          </p:nvPr>
+        </p:nvSpPr>
+        <p:spPr/>
+      </p:sp>
+    </p:spTree>
+  </p:cSld>
+  <p:clrMapOvr>
+    <a:masterClrMapping/>
+  </p:clrMapOvr>
+</p:notes>
+</file>
+
+<file path=ppt/notesSlides/notesSlide35.xml><?xml version="1.0" encoding="utf-8"?>
+<p:notes xmlns:a="http://schemas.openxmlformats.org/drawingml/2006/main" xmlns:p="http://schemas.openxmlformats.org/presentationml/2006/main" xmlns:r="http://schemas.openxmlformats.org/officeDocument/2006/relationships">
+  <p:cSld>
+    <p:spTree>
+      <p:nvGrpSpPr>
+        <p:cNvPr id="1" name=""/>
+        <p:cNvGrpSpPr/>
+        <p:nvPr/>
+      </p:nvGrpSpPr>
+      <p:grpSpPr>
+        <a:xfrm>
+          <a:off x="0" y="0"/>
+          <a:ext cx="0" cy="0"/>
+          <a:chOff x="0" y="0"/>
+          <a:chExt cx="0" cy="0"/>
+        </a:xfrm>
+      </p:grpSpPr>
+      <p:sp>
+        <p:nvSpPr>
+          <p:cNvPr id="2" name="Slide Image Placeholder 1"/>
+          <p:cNvSpPr>
+            <a:spLocks noGrp="1"/>
+          </p:cNvSpPr>
+          <p:nvPr>
+            <p:ph type="sldImg" idx="2"/>
+          </p:nvPr>
+        </p:nvSpPr>
+        <p:spPr/>
+      </p:sp>
+      <p:sp>
+        <p:nvSpPr>
+          <p:cNvPr id="3" name="Notes Placeholder 2"/>
+          <p:cNvSpPr>
+            <a:spLocks noGrp="1"/>
+          </p:cNvSpPr>
+          <p:nvPr>
+            <p:ph type="body" idx="3" sz="quarter"/>
+          </p:nvPr>
+        </p:nvSpPr>
+        <p:spPr/>
+        <p:txBody>
+          <a:bodyPr/>
+          <a:lstStyle/>
+          <a:p>
+            <a:r>
+              <a:t>【取舍】局限与下一步</a:t>
+            </a:r>
+          </a:p>
+          <a:p>
+            <a:r>
+              <a:t>目的：主动暴露局限，建立可信度。</a:t>
+            </a:r>
+          </a:p>
+          <a:p>
+            <a:r>
+              <a:t>讲述要点：</a:t>
+            </a:r>
+          </a:p>
+          <a:p>
+            <a:r>
+              <a:t>- 词法仍有盲区，同义词表覆盖有限；下一步做查询改写。</a:t>
+            </a:r>
+          </a:p>
+          <a:p>
+            <a:r>
+              <a:t>- 重排有 1 秒左右延迟，冷启动 9 秒；前者可缓存，后者可预热。</a:t>
+            </a:r>
+          </a:p>
+          <a:p>
+            <a:r>
+              <a:t>- 最重要的是没有临床前瞻验证；只有 WDBC 回溯数据，不能声称临床有效。</a:t>
+            </a:r>
+          </a:p>
+          <a:p>
+            <a:r>
+              <a:t>过渡：最后收束。</a:t>
+            </a:r>
+          </a:p>
+        </p:txBody>
+      </p:sp>
+      <p:sp>
+        <p:nvSpPr>
+          <p:cNvPr id="4" name="Slide Number Placeholder 3"/>
+          <p:cNvSpPr>
+            <a:spLocks noGrp="1"/>
+          </p:cNvSpPr>
+          <p:nvPr>
+            <p:ph type="sldNum" idx="5" sz="quarter"/>
+          </p:nvPr>
+        </p:nvSpPr>
+        <p:spPr/>
+      </p:sp>
+    </p:spTree>
+  </p:cSld>
+  <p:clrMapOvr>
+    <a:masterClrMapping/>
+  </p:clrMapOvr>
+</p:notes>
+</file>
+
+<file path=ppt/notesSlides/notesSlide36.xml><?xml version="1.0" encoding="utf-8"?>
+<p:notes xmlns:a="http://schemas.openxmlformats.org/drawingml/2006/main" xmlns:p="http://schemas.openxmlformats.org/presentationml/2006/main" xmlns:r="http://schemas.openxmlformats.org/officeDocument/2006/relationships">
+  <p:cSld>
+    <p:spTree>
+      <p:nvGrpSpPr>
+        <p:cNvPr id="1" name=""/>
+        <p:cNvGrpSpPr/>
+        <p:nvPr/>
+      </p:nvGrpSpPr>
+      <p:grpSpPr>
+        <a:xfrm>
+          <a:off x="0" y="0"/>
+          <a:ext cx="0" cy="0"/>
+          <a:chOff x="0" y="0"/>
+          <a:chExt cx="0" cy="0"/>
+        </a:xfrm>
+      </p:grpSpPr>
+      <p:sp>
+        <p:nvSpPr>
+          <p:cNvPr id="2" name="Slide Image Placeholder 1"/>
+          <p:cNvSpPr>
+            <a:spLocks noGrp="1"/>
+          </p:cNvSpPr>
+          <p:nvPr>
+            <p:ph type="sldImg" idx="2"/>
+          </p:nvPr>
+        </p:nvSpPr>
+        <p:spPr/>
+      </p:sp>
+      <p:sp>
+        <p:nvSpPr>
+          <p:cNvPr id="3" name="Notes Placeholder 2"/>
+          <p:cNvSpPr>
+            <a:spLocks noGrp="1"/>
+          </p:cNvSpPr>
+          <p:nvPr>
+            <p:ph type="body" idx="3" sz="quarter"/>
+          </p:nvPr>
+        </p:nvSpPr>
+        <p:spPr/>
+        <p:txBody>
+          <a:bodyPr/>
+          <a:lstStyle/>
+          <a:p>
+            <a:r>
+              <a:t>【收束】收束</a:t>
+            </a:r>
+          </a:p>
+          <a:p>
+            <a:r>
+              <a:t>目的：三句话收束，留出提问。</a:t>
+            </a:r>
+          </a:p>
+          <a:p>
+            <a:r>
+              <a:t>讲述要点：</a:t>
+            </a:r>
+          </a:p>
+          <a:p>
+            <a:r>
+              <a:t>- 第一，流程可复现：10 个节点、13 个工具、检查点。</a:t>
+            </a:r>
+          </a:p>
+          <a:p>
+            <a:r>
+              <a:t>- 第二，结论可核对：1,035 条条款 + 句子级 grounding。</a:t>
+            </a:r>
+          </a:p>
+          <a:p>
+            <a:r>
+              <a:t>- 第三，边界先讲清：三档不确定性、拒答、Coze 只做运营。</a:t>
+            </a:r>
+          </a:p>
+          <a:p>
+            <a:r>
+              <a:t>过渡：致谢，进入提问。</a:t>
+            </a:r>
+          </a:p>
+          <a:p>
+            <a:r>
+              <a:t>提示：停顿 2 秒</a:t>
             </a:r>
           </a:p>
         </p:txBody>
@@ -2441,7 +3552,7 @@
           </a:p>
           <a:p>
             <a:r>
-              <a:t>目的：证明技术选型可控、代码量真实、没有过度依赖。</a:t>
+              <a:t>目的：用代码量和组件表证明系统是自建、可讲清。</a:t>
             </a:r>
           </a:p>
           <a:p>
@@ -2451,22 +3562,22 @@
           </a:p>
           <a:p>
             <a:r>
-              <a:t>- 后端 Flask + gunicorn，前端原生 JS，避免 React 构建链在答辩环境出问题。</a:t>
-            </a:r>
-          </a:p>
-          <a:p>
-            <a:r>
-              <a:t>- 模型是 sklearn 集成 + 校准，不是调 API；RAG 的倒排和向量都落在 SQLite。</a:t>
-            </a:r>
-          </a:p>
-          <a:p>
-            <a:r>
-              <a:t>- 运维只有 Shell + Nginx + Actions，部署可复现。</a:t>
-            </a:r>
-          </a:p>
-          <a:p>
-            <a:r>
-              <a:t>过渡：从技术栈切到真实链路：一次预测发生了什么。</a:t>
+              <a:t>- 后端 Flask，模板 Jinja2，前端原生 JS，避免答辩环境依赖 Node 构建。</a:t>
+            </a:r>
+          </a:p>
+          <a:p>
+            <a:r>
+              <a:t>- 模型是 sklearn 集成 + 校准；检索是 TF-IDF + ONNX 嵌入，都没有外部服务。</a:t>
+            </a:r>
+          </a:p>
+          <a:p>
+            <a:r>
+              <a:t>- SQLite 18 张表，部署只需要一个文件。</a:t>
+            </a:r>
+          </a:p>
+          <a:p>
+            <a:r>
+              <a:t>过渡：看一次预测从表单到结果。</a:t>
             </a:r>
           </a:p>
         </p:txBody>
@@ -2541,7 +3652,7 @@
           </a:p>
           <a:p>
             <a:r>
-              <a:t>目的：把模型调用讲成可验证的工程链路。</a:t>
+              <a:t>目的：把模型调用讲成六步可验证链路。</a:t>
             </a:r>
           </a:p>
           <a:p>
@@ -2551,22 +3662,22 @@
           </a:p>
           <a:p>
             <a:r>
-              <a:t>- 表单提交 30 项特征，后端先做单位与范围校验。</a:t>
-            </a:r>
-          </a:p>
-          <a:p>
-            <a:r>
-              <a:t>- 标准化参数来自训练集，避免数据泄漏；集成模型输出原始概率。</a:t>
-            </a:r>
-          </a:p>
-          <a:p>
-            <a:r>
-              <a:t>- 校准后再展示，结果页同时给出证据强度与输入距离。</a:t>
-            </a:r>
-          </a:p>
-          <a:p>
-            <a:r>
-              <a:t>过渡：看结果页实际长什么样。</a:t>
+              <a:t>- 表单校验在前端和后端各做一次，避免单位错误进入模型。</a:t>
+            </a:r>
+          </a:p>
+          <a:p>
+            <a:r>
+              <a:t>- 标准化参数来自训练集，不是现场计算，避免数据泄漏。</a:t>
+            </a:r>
+          </a:p>
+          <a:p>
+            <a:r>
+              <a:t>- 校准后的概率才展示；原始概率偏乐观，会堆在 0.99 附近。</a:t>
+            </a:r>
+          </a:p>
+          <a:p>
+            <a:r>
+              <a:t>过渡：看结果页实际呈现。</a:t>
             </a:r>
           </a:p>
         </p:txBody>
@@ -2641,7 +3752,7 @@
           </a:p>
           <a:p>
             <a:r>
-              <a:t>目的：用真实界面证明结果不是一行字，而是一组可核对的证据。</a:t>
+              <a:t>目的：证明结果不是一行字，而是一组可核对的证据。</a:t>
             </a:r>
           </a:p>
           <a:p>
@@ -2651,22 +3762,22 @@
           </a:p>
           <a:p>
             <a:r>
-              <a:t>- 注意右侧证据强度条：绿色代表证据充分，灰/黄会提示谨慎。</a:t>
-            </a:r>
-          </a:p>
-          <a:p>
-            <a:r>
-              <a:t>- Top 5 归因是模型在看什么，不是因果；页面明确写了这一点。</a:t>
-            </a:r>
-          </a:p>
-          <a:p>
-            <a:r>
-              <a:t>- 相似病例只做对照，不构成临床证据，避免过度解读。</a:t>
-            </a:r>
-          </a:p>
-          <a:p>
-            <a:r>
-              <a:t>过渡：接下来进入 Agent：这些解释是谁生成的？</a:t>
+              <a:t>- 右侧证据强度条由置信度、输入距离和知识命中共同决定。</a:t>
+            </a:r>
+          </a:p>
+          <a:p>
+            <a:r>
+              <a:t>- Top 5 是模型在看什么，不是因果；页面明确写了这一点。</a:t>
+            </a:r>
+          </a:p>
+          <a:p>
+            <a:r>
+              <a:t>- 相似病例只做对照，不构成临床证据。</a:t>
+            </a:r>
+          </a:p>
+          <a:p>
+            <a:r>
+              <a:t>过渡：进入 Agent：这些解释是谁生成的？</a:t>
             </a:r>
           </a:p>
         </p:txBody>
@@ -2736,12 +3847,12 @@
           <a:lstStyle/>
           <a:p>
             <a:r>
-              <a:t>【转折】Agent 定位</a:t>
-            </a:r>
-          </a:p>
-          <a:p>
-            <a:r>
-              <a:t>目的：把 Agent 从"会聊天"重新定义为"会调工具、会被约束、会留痕"。</a:t>
+              <a:t>【过渡】章节页：Agent</a:t>
+            </a:r>
+          </a:p>
+          <a:p>
+            <a:r>
+              <a:t>目的：把观众注意力切到用户端 Agent。</a:t>
             </a:r>
           </a:p>
           <a:p>
@@ -2751,22 +3862,22 @@
           </a:p>
           <a:p>
             <a:r>
-              <a:t>- 聊天框只输出文本；Agent 要能查记录、跑模型、导报告、检索知识。</a:t>
-            </a:r>
-          </a:p>
-          <a:p>
-            <a:r>
-              <a:t>- 13 个意图决定走哪条路径，11 个节点保证流程可复现。</a:t>
-            </a:r>
-          </a:p>
-          <a:p>
-            <a:r>
-              <a:t>- 工具调用有权限和超时，模型不能无限自由发挥。</a:t>
-            </a:r>
-          </a:p>
-          <a:p>
-            <a:r>
-              <a:t>过渡：看这张图是怎么跑起来的。</a:t>
+              <a:t>- 这一部分回答：为什么不是聊天框，以及流程怎么保证可复现。</a:t>
+            </a:r>
+          </a:p>
+          <a:p>
+            <a:r>
+              <a:t>- 会先给 Graph 结构，再给状态、工具、意图、流式和子代理。</a:t>
+            </a:r>
+          </a:p>
+          <a:p>
+            <a:r>
+              <a:t>- 最后用三档不确定性和 grounding 收口。</a:t>
+            </a:r>
+          </a:p>
+          <a:p>
+            <a:r>
+              <a:t>过渡：先给 Agent 的定位。</a:t>
             </a:r>
           </a:p>
         </p:txBody>
@@ -2836,12 +3947,12 @@
           <a:lstStyle/>
           <a:p>
             <a:r>
-              <a:t>【架构】Agent 图</a:t>
-            </a:r>
-          </a:p>
-          <a:p>
-            <a:r>
-              <a:t>目的：讲清自研 Graph 的节点、条件边与检查点。</a:t>
+              <a:t>【定位】Agent 定位</a:t>
+            </a:r>
+          </a:p>
+          <a:p>
+            <a:r>
+              <a:t>目的：重新定义 Agent：能调工具、能拒答、能回放。</a:t>
             </a:r>
           </a:p>
           <a:p>
@@ -2851,22 +3962,22 @@
           </a:p>
           <a:p>
             <a:r>
-              <a:t>- guard 先拦越界问题；cache 命中就直接返回，省掉重复调用。</a:t>
-            </a:r>
-          </a:p>
-          <a:p>
-            <a:r>
-              <a:t>- route 决定意图，act 才去调工具；assess 在合成前判断证据够不够。</a:t>
-            </a:r>
-          </a:p>
-          <a:p>
-            <a:r>
-              <a:t>- verify 做数字对账，persist 把每一步写进检查点，支持回放和续跑。</a:t>
-            </a:r>
-          </a:p>
-          <a:p>
-            <a:r>
-              <a:t>过渡：为什么不用 LangChain？下一层解释取舍。</a:t>
+              <a:t>- 聊天框只输出文本；这里要能查记录、跑模型、导报告、检索知识。</a:t>
+            </a:r>
+          </a:p>
+          <a:p>
+            <a:r>
+              <a:t>- 13 类意图决定走哪条路径，10 个节点保证流程可复现。</a:t>
+            </a:r>
+          </a:p>
+          <a:p>
+            <a:r>
+              <a:t>- 拒答是能力，不是失败；第 16 页会讲三档阈值。</a:t>
+            </a:r>
+          </a:p>
+          <a:p>
+            <a:r>
+              <a:t>过渡：看这张图具体长什么样。</a:t>
             </a:r>
           </a:p>
         </p:txBody>
@@ -2936,12 +4047,12 @@
           <a:lstStyle/>
           <a:p>
             <a:r>
-              <a:t>【架构】框架取舍</a:t>
-            </a:r>
-          </a:p>
-          <a:p>
-            <a:r>
-              <a:t>目的：解释自研 Graph 的动机：可控、可测、可回放。</a:t>
+              <a:t>【架构】Graph 结构</a:t>
+            </a:r>
+          </a:p>
+          <a:p>
+            <a:r>
+              <a:t>目的：逐节点讲职责与两条条件边。</a:t>
             </a:r>
           </a:p>
           <a:p>
@@ -2951,22 +4062,22 @@
           </a:p>
           <a:p>
             <a:r>
-              <a:t>- LangGraph 能力强，但依赖多、版本变化快，答辩环境不可控。</a:t>
-            </a:r>
-          </a:p>
-          <a:p>
-            <a:r>
-              <a:t>- 自研 Graph 只有 163 行，节点和边显式声明，测试可以逐节点打。</a:t>
-            </a:r>
-          </a:p>
-          <a:p>
-            <a:r>
-              <a:t>- 约束层是灵魂：模型可以自由推理，但不能自由下结论。</a:t>
-            </a:r>
-          </a:p>
-          <a:p>
-            <a:r>
-              <a:t>过渡：具体看工具与约束怎么落地。</a:t>
+              <a:t>- guard 命中直接进 refuse，再走 persist；cache 命中跳过 route。</a:t>
+            </a:r>
+          </a:p>
+          <a:p>
+            <a:r>
+              <a:t>- route 之后是 act → assess → compose → verify → guard_out → persist → finish。</a:t>
+            </a:r>
+          </a:p>
+          <a:p>
+            <a:r>
+              <a:t>- 节点内部才是模型自由发挥的地方，流程本身不可被模型改写。</a:t>
+            </a:r>
+          </a:p>
+          <a:p>
+            <a:r>
+              <a:t>过渡：流程要能回放，靠的是状态和检查点。</a:t>
             </a:r>
           </a:p>
         </p:txBody>
@@ -6718,6 +7829,174 @@
 </p:sld>
 </file>
 
+<file path=ppt/slides/slide26.xml><?xml version="1.0" encoding="utf-8"?>
+<p:sld xmlns:a="http://schemas.openxmlformats.org/drawingml/2006/main" xmlns:p="http://schemas.openxmlformats.org/presentationml/2006/main" xmlns:r="http://schemas.openxmlformats.org/officeDocument/2006/relationships">
+  <p:cSld>
+    <p:spTree>
+      <p:nvGrpSpPr>
+        <p:cNvPr id="1" name=""/>
+        <p:cNvGrpSpPr/>
+        <p:nvPr/>
+      </p:nvGrpSpPr>
+      <p:grpSpPr/>
+      <p:pic>
+        <p:nvPicPr>
+          <p:cNvPr id="2" name="Picture 1" descr="slide-26.png"/>
+          <p:cNvPicPr>
+            <a:picLocks noChangeAspect="1"/>
+          </p:cNvPicPr>
+          <p:nvPr/>
+        </p:nvPicPr>
+        <p:blipFill>
+          <a:blip r:embed="rId2"/>
+          <a:stretch>
+            <a:fillRect/>
+          </a:stretch>
+        </p:blipFill>
+        <p:spPr>
+          <a:xfrm>
+            <a:off x="0" y="0"/>
+            <a:ext cx="12191695" cy="6858000"/>
+          </a:xfrm>
+          <a:prstGeom prst="rect">
+            <a:avLst/>
+          </a:prstGeom>
+        </p:spPr>
+      </p:pic>
+    </p:spTree>
+  </p:cSld>
+  <p:clrMapOvr>
+    <a:masterClrMapping/>
+  </p:clrMapOvr>
+</p:sld>
+</file>
+
+<file path=ppt/slides/slide27.xml><?xml version="1.0" encoding="utf-8"?>
+<p:sld xmlns:a="http://schemas.openxmlformats.org/drawingml/2006/main" xmlns:p="http://schemas.openxmlformats.org/presentationml/2006/main" xmlns:r="http://schemas.openxmlformats.org/officeDocument/2006/relationships">
+  <p:cSld>
+    <p:spTree>
+      <p:nvGrpSpPr>
+        <p:cNvPr id="1" name=""/>
+        <p:cNvGrpSpPr/>
+        <p:nvPr/>
+      </p:nvGrpSpPr>
+      <p:grpSpPr/>
+      <p:pic>
+        <p:nvPicPr>
+          <p:cNvPr id="2" name="Picture 1" descr="slide-27.png"/>
+          <p:cNvPicPr>
+            <a:picLocks noChangeAspect="1"/>
+          </p:cNvPicPr>
+          <p:nvPr/>
+        </p:nvPicPr>
+        <p:blipFill>
+          <a:blip r:embed="rId2"/>
+          <a:stretch>
+            <a:fillRect/>
+          </a:stretch>
+        </p:blipFill>
+        <p:spPr>
+          <a:xfrm>
+            <a:off x="0" y="0"/>
+            <a:ext cx="12191695" cy="6858000"/>
+          </a:xfrm>
+          <a:prstGeom prst="rect">
+            <a:avLst/>
+          </a:prstGeom>
+        </p:spPr>
+      </p:pic>
+    </p:spTree>
+  </p:cSld>
+  <p:clrMapOvr>
+    <a:masterClrMapping/>
+  </p:clrMapOvr>
+</p:sld>
+</file>
+
+<file path=ppt/slides/slide28.xml><?xml version="1.0" encoding="utf-8"?>
+<p:sld xmlns:a="http://schemas.openxmlformats.org/drawingml/2006/main" xmlns:p="http://schemas.openxmlformats.org/presentationml/2006/main" xmlns:r="http://schemas.openxmlformats.org/officeDocument/2006/relationships">
+  <p:cSld>
+    <p:spTree>
+      <p:nvGrpSpPr>
+        <p:cNvPr id="1" name=""/>
+        <p:cNvGrpSpPr/>
+        <p:nvPr/>
+      </p:nvGrpSpPr>
+      <p:grpSpPr/>
+      <p:pic>
+        <p:nvPicPr>
+          <p:cNvPr id="2" name="Picture 1" descr="slide-28.png"/>
+          <p:cNvPicPr>
+            <a:picLocks noChangeAspect="1"/>
+          </p:cNvPicPr>
+          <p:nvPr/>
+        </p:nvPicPr>
+        <p:blipFill>
+          <a:blip r:embed="rId2"/>
+          <a:stretch>
+            <a:fillRect/>
+          </a:stretch>
+        </p:blipFill>
+        <p:spPr>
+          <a:xfrm>
+            <a:off x="0" y="0"/>
+            <a:ext cx="12191695" cy="6858000"/>
+          </a:xfrm>
+          <a:prstGeom prst="rect">
+            <a:avLst/>
+          </a:prstGeom>
+        </p:spPr>
+      </p:pic>
+    </p:spTree>
+  </p:cSld>
+  <p:clrMapOvr>
+    <a:masterClrMapping/>
+  </p:clrMapOvr>
+</p:sld>
+</file>
+
+<file path=ppt/slides/slide29.xml><?xml version="1.0" encoding="utf-8"?>
+<p:sld xmlns:a="http://schemas.openxmlformats.org/drawingml/2006/main" xmlns:p="http://schemas.openxmlformats.org/presentationml/2006/main" xmlns:r="http://schemas.openxmlformats.org/officeDocument/2006/relationships">
+  <p:cSld>
+    <p:spTree>
+      <p:nvGrpSpPr>
+        <p:cNvPr id="1" name=""/>
+        <p:cNvGrpSpPr/>
+        <p:nvPr/>
+      </p:nvGrpSpPr>
+      <p:grpSpPr/>
+      <p:pic>
+        <p:nvPicPr>
+          <p:cNvPr id="2" name="Picture 1" descr="slide-29.png"/>
+          <p:cNvPicPr>
+            <a:picLocks noChangeAspect="1"/>
+          </p:cNvPicPr>
+          <p:nvPr/>
+        </p:nvPicPr>
+        <p:blipFill>
+          <a:blip r:embed="rId2"/>
+          <a:stretch>
+            <a:fillRect/>
+          </a:stretch>
+        </p:blipFill>
+        <p:spPr>
+          <a:xfrm>
+            <a:off x="0" y="0"/>
+            <a:ext cx="12191695" cy="6858000"/>
+          </a:xfrm>
+          <a:prstGeom prst="rect">
+            <a:avLst/>
+          </a:prstGeom>
+        </p:spPr>
+      </p:pic>
+    </p:spTree>
+  </p:cSld>
+  <p:clrMapOvr>
+    <a:masterClrMapping/>
+  </p:clrMapOvr>
+</p:sld>
+</file>
+
 <file path=ppt/slides/slide3.xml><?xml version="1.0" encoding="utf-8"?>
 <p:sld xmlns:a="http://schemas.openxmlformats.org/drawingml/2006/main" xmlns:p="http://schemas.openxmlformats.org/presentationml/2006/main" xmlns:r="http://schemas.openxmlformats.org/officeDocument/2006/relationships">
   <p:cSld>
@@ -6731,6 +8010,300 @@
       <p:pic>
         <p:nvPicPr>
           <p:cNvPr id="2" name="Picture 1" descr="slide-03.png"/>
+          <p:cNvPicPr>
+            <a:picLocks noChangeAspect="1"/>
+          </p:cNvPicPr>
+          <p:nvPr/>
+        </p:nvPicPr>
+        <p:blipFill>
+          <a:blip r:embed="rId2"/>
+          <a:stretch>
+            <a:fillRect/>
+          </a:stretch>
+        </p:blipFill>
+        <p:spPr>
+          <a:xfrm>
+            <a:off x="0" y="0"/>
+            <a:ext cx="12191695" cy="6858000"/>
+          </a:xfrm>
+          <a:prstGeom prst="rect">
+            <a:avLst/>
+          </a:prstGeom>
+        </p:spPr>
+      </p:pic>
+    </p:spTree>
+  </p:cSld>
+  <p:clrMapOvr>
+    <a:masterClrMapping/>
+  </p:clrMapOvr>
+</p:sld>
+</file>
+
+<file path=ppt/slides/slide30.xml><?xml version="1.0" encoding="utf-8"?>
+<p:sld xmlns:a="http://schemas.openxmlformats.org/drawingml/2006/main" xmlns:p="http://schemas.openxmlformats.org/presentationml/2006/main" xmlns:r="http://schemas.openxmlformats.org/officeDocument/2006/relationships">
+  <p:cSld>
+    <p:spTree>
+      <p:nvGrpSpPr>
+        <p:cNvPr id="1" name=""/>
+        <p:cNvGrpSpPr/>
+        <p:nvPr/>
+      </p:nvGrpSpPr>
+      <p:grpSpPr/>
+      <p:pic>
+        <p:nvPicPr>
+          <p:cNvPr id="2" name="Picture 1" descr="slide-30.png"/>
+          <p:cNvPicPr>
+            <a:picLocks noChangeAspect="1"/>
+          </p:cNvPicPr>
+          <p:nvPr/>
+        </p:nvPicPr>
+        <p:blipFill>
+          <a:blip r:embed="rId2"/>
+          <a:stretch>
+            <a:fillRect/>
+          </a:stretch>
+        </p:blipFill>
+        <p:spPr>
+          <a:xfrm>
+            <a:off x="0" y="0"/>
+            <a:ext cx="12191695" cy="6858000"/>
+          </a:xfrm>
+          <a:prstGeom prst="rect">
+            <a:avLst/>
+          </a:prstGeom>
+        </p:spPr>
+      </p:pic>
+    </p:spTree>
+  </p:cSld>
+  <p:clrMapOvr>
+    <a:masterClrMapping/>
+  </p:clrMapOvr>
+</p:sld>
+</file>
+
+<file path=ppt/slides/slide31.xml><?xml version="1.0" encoding="utf-8"?>
+<p:sld xmlns:a="http://schemas.openxmlformats.org/drawingml/2006/main" xmlns:p="http://schemas.openxmlformats.org/presentationml/2006/main" xmlns:r="http://schemas.openxmlformats.org/officeDocument/2006/relationships">
+  <p:cSld>
+    <p:spTree>
+      <p:nvGrpSpPr>
+        <p:cNvPr id="1" name=""/>
+        <p:cNvGrpSpPr/>
+        <p:nvPr/>
+      </p:nvGrpSpPr>
+      <p:grpSpPr/>
+      <p:pic>
+        <p:nvPicPr>
+          <p:cNvPr id="2" name="Picture 1" descr="slide-31.png"/>
+          <p:cNvPicPr>
+            <a:picLocks noChangeAspect="1"/>
+          </p:cNvPicPr>
+          <p:nvPr/>
+        </p:nvPicPr>
+        <p:blipFill>
+          <a:blip r:embed="rId2"/>
+          <a:stretch>
+            <a:fillRect/>
+          </a:stretch>
+        </p:blipFill>
+        <p:spPr>
+          <a:xfrm>
+            <a:off x="0" y="0"/>
+            <a:ext cx="12191695" cy="6858000"/>
+          </a:xfrm>
+          <a:prstGeom prst="rect">
+            <a:avLst/>
+          </a:prstGeom>
+        </p:spPr>
+      </p:pic>
+    </p:spTree>
+  </p:cSld>
+  <p:clrMapOvr>
+    <a:masterClrMapping/>
+  </p:clrMapOvr>
+</p:sld>
+</file>
+
+<file path=ppt/slides/slide32.xml><?xml version="1.0" encoding="utf-8"?>
+<p:sld xmlns:a="http://schemas.openxmlformats.org/drawingml/2006/main" xmlns:p="http://schemas.openxmlformats.org/presentationml/2006/main" xmlns:r="http://schemas.openxmlformats.org/officeDocument/2006/relationships">
+  <p:cSld>
+    <p:spTree>
+      <p:nvGrpSpPr>
+        <p:cNvPr id="1" name=""/>
+        <p:cNvGrpSpPr/>
+        <p:nvPr/>
+      </p:nvGrpSpPr>
+      <p:grpSpPr/>
+      <p:pic>
+        <p:nvPicPr>
+          <p:cNvPr id="2" name="Picture 1" descr="slide-32.png"/>
+          <p:cNvPicPr>
+            <a:picLocks noChangeAspect="1"/>
+          </p:cNvPicPr>
+          <p:nvPr/>
+        </p:nvPicPr>
+        <p:blipFill>
+          <a:blip r:embed="rId2"/>
+          <a:stretch>
+            <a:fillRect/>
+          </a:stretch>
+        </p:blipFill>
+        <p:spPr>
+          <a:xfrm>
+            <a:off x="0" y="0"/>
+            <a:ext cx="12191695" cy="6858000"/>
+          </a:xfrm>
+          <a:prstGeom prst="rect">
+            <a:avLst/>
+          </a:prstGeom>
+        </p:spPr>
+      </p:pic>
+    </p:spTree>
+  </p:cSld>
+  <p:clrMapOvr>
+    <a:masterClrMapping/>
+  </p:clrMapOvr>
+</p:sld>
+</file>
+
+<file path=ppt/slides/slide33.xml><?xml version="1.0" encoding="utf-8"?>
+<p:sld xmlns:a="http://schemas.openxmlformats.org/drawingml/2006/main" xmlns:p="http://schemas.openxmlformats.org/presentationml/2006/main" xmlns:r="http://schemas.openxmlformats.org/officeDocument/2006/relationships">
+  <p:cSld>
+    <p:spTree>
+      <p:nvGrpSpPr>
+        <p:cNvPr id="1" name=""/>
+        <p:cNvGrpSpPr/>
+        <p:nvPr/>
+      </p:nvGrpSpPr>
+      <p:grpSpPr/>
+      <p:pic>
+        <p:nvPicPr>
+          <p:cNvPr id="2" name="Picture 1" descr="slide-33.png"/>
+          <p:cNvPicPr>
+            <a:picLocks noChangeAspect="1"/>
+          </p:cNvPicPr>
+          <p:nvPr/>
+        </p:nvPicPr>
+        <p:blipFill>
+          <a:blip r:embed="rId2"/>
+          <a:stretch>
+            <a:fillRect/>
+          </a:stretch>
+        </p:blipFill>
+        <p:spPr>
+          <a:xfrm>
+            <a:off x="0" y="0"/>
+            <a:ext cx="12191695" cy="6858000"/>
+          </a:xfrm>
+          <a:prstGeom prst="rect">
+            <a:avLst/>
+          </a:prstGeom>
+        </p:spPr>
+      </p:pic>
+    </p:spTree>
+  </p:cSld>
+  <p:clrMapOvr>
+    <a:masterClrMapping/>
+  </p:clrMapOvr>
+</p:sld>
+</file>
+
+<file path=ppt/slides/slide34.xml><?xml version="1.0" encoding="utf-8"?>
+<p:sld xmlns:a="http://schemas.openxmlformats.org/drawingml/2006/main" xmlns:p="http://schemas.openxmlformats.org/presentationml/2006/main" xmlns:r="http://schemas.openxmlformats.org/officeDocument/2006/relationships">
+  <p:cSld>
+    <p:spTree>
+      <p:nvGrpSpPr>
+        <p:cNvPr id="1" name=""/>
+        <p:cNvGrpSpPr/>
+        <p:nvPr/>
+      </p:nvGrpSpPr>
+      <p:grpSpPr/>
+      <p:pic>
+        <p:nvPicPr>
+          <p:cNvPr id="2" name="Picture 1" descr="slide-34.png"/>
+          <p:cNvPicPr>
+            <a:picLocks noChangeAspect="1"/>
+          </p:cNvPicPr>
+          <p:nvPr/>
+        </p:nvPicPr>
+        <p:blipFill>
+          <a:blip r:embed="rId2"/>
+          <a:stretch>
+            <a:fillRect/>
+          </a:stretch>
+        </p:blipFill>
+        <p:spPr>
+          <a:xfrm>
+            <a:off x="0" y="0"/>
+            <a:ext cx="12191695" cy="6858000"/>
+          </a:xfrm>
+          <a:prstGeom prst="rect">
+            <a:avLst/>
+          </a:prstGeom>
+        </p:spPr>
+      </p:pic>
+    </p:spTree>
+  </p:cSld>
+  <p:clrMapOvr>
+    <a:masterClrMapping/>
+  </p:clrMapOvr>
+</p:sld>
+</file>
+
+<file path=ppt/slides/slide35.xml><?xml version="1.0" encoding="utf-8"?>
+<p:sld xmlns:a="http://schemas.openxmlformats.org/drawingml/2006/main" xmlns:p="http://schemas.openxmlformats.org/presentationml/2006/main" xmlns:r="http://schemas.openxmlformats.org/officeDocument/2006/relationships">
+  <p:cSld>
+    <p:spTree>
+      <p:nvGrpSpPr>
+        <p:cNvPr id="1" name=""/>
+        <p:cNvGrpSpPr/>
+        <p:nvPr/>
+      </p:nvGrpSpPr>
+      <p:grpSpPr/>
+      <p:pic>
+        <p:nvPicPr>
+          <p:cNvPr id="2" name="Picture 1" descr="slide-35.png"/>
+          <p:cNvPicPr>
+            <a:picLocks noChangeAspect="1"/>
+          </p:cNvPicPr>
+          <p:nvPr/>
+        </p:nvPicPr>
+        <p:blipFill>
+          <a:blip r:embed="rId2"/>
+          <a:stretch>
+            <a:fillRect/>
+          </a:stretch>
+        </p:blipFill>
+        <p:spPr>
+          <a:xfrm>
+            <a:off x="0" y="0"/>
+            <a:ext cx="12191695" cy="6858000"/>
+          </a:xfrm>
+          <a:prstGeom prst="rect">
+            <a:avLst/>
+          </a:prstGeom>
+        </p:spPr>
+      </p:pic>
+    </p:spTree>
+  </p:cSld>
+  <p:clrMapOvr>
+    <a:masterClrMapping/>
+  </p:clrMapOvr>
+</p:sld>
+</file>
+
+<file path=ppt/slides/slide36.xml><?xml version="1.0" encoding="utf-8"?>
+<p:sld xmlns:a="http://schemas.openxmlformats.org/drawingml/2006/main" xmlns:p="http://schemas.openxmlformats.org/presentationml/2006/main" xmlns:r="http://schemas.openxmlformats.org/officeDocument/2006/relationships">
+  <p:cSld>
+    <p:spTree>
+      <p:nvGrpSpPr>
+        <p:cNvPr id="1" name=""/>
+        <p:cNvGrpSpPr/>
+        <p:nvPr/>
+      </p:nvGrpSpPr>
+      <p:grpSpPr/>
+      <p:pic>
+        <p:nvPicPr>
+          <p:cNvPr id="2" name="Picture 1" descr="slide-36.png"/>
           <p:cNvPicPr>
             <a:picLocks noChangeAspect="1"/>
           </p:cNvPicPr>

--- a/ppt-defense/乳腺癌辅助诊断系统-答辩.pptx
+++ b/ppt-defense/乳腺癌辅助诊断系统-答辩.pptx
@@ -40,7 +40,6 @@
     <p:sldId id="288" r:id="rId40"/>
     <p:sldId id="289" r:id="rId41"/>
     <p:sldId id="290" r:id="rId42"/>
-    <p:sldId id="291" r:id="rId43"/>
   </p:sldIdLst>
   <p:sldSz cx="12191695" cy="6858000" type="screen4x3"/>
   <p:notesSz cx="6858000" cy="9144000"/>
@@ -642,12 +641,12 @@
           <a:lstStyle/>
           <a:p>
             <a:r>
-              <a:t>【架构】状态与检查点</a:t>
-            </a:r>
-          </a:p>
-          <a:p>
-            <a:r>
-              <a:t>目的：解释可回放不是口号：状态结构 + 检查点表。</a:t>
+              <a:t>【架构】真实执行</a:t>
+            </a:r>
+          </a:p>
+          <a:p>
+            <a:r>
+              <a:t>目的：用真实 trace 证明流程与耗时，不回避冷启动。</a:t>
             </a:r>
           </a:p>
           <a:p>
@@ -657,22 +656,22 @@
           </a:p>
           <a:p>
             <a:r>
-              <a:t>- state 里只有可序列化字段；emit 这类回调不会写进去。</a:t>
-            </a:r>
-          </a:p>
-          <a:p>
-            <a:r>
-              <a:t>- 每个节点执行完都保存 seq/node/next/state，Interrupt 也保存 pending。</a:t>
-            </a:r>
-          </a:p>
-          <a:p>
-            <a:r>
-              <a:t>- 这让我们能回答"第 4 步为什么慢""哪一步失败了"。</a:t>
-            </a:r>
-          </a:p>
-          <a:p>
-            <a:r>
-              <a:t>过渡：看一次真实执行的节点耗时。</a:t>
+              <a:t>- 这是"这个结果什么意思"的真实执行：10 个节点，act 占 139ms。</a:t>
+            </a:r>
+          </a:p>
+          <a:p>
+            <a:r>
+              <a:t>- act 里同时跑了 predict、explain 和特征词典检索，所以是最大头。</a:t>
+            </a:r>
+          </a:p>
+          <a:p>
+            <a:r>
+              <a:t>- 医学问题首次会到 30s，主要是 90MB 模型加载和重排；热查询约 1s。</a:t>
+            </a:r>
+          </a:p>
+          <a:p>
+            <a:r>
+              <a:t>过渡：工具是 act 的手脚，下面看 13 个工具。</a:t>
             </a:r>
           </a:p>
         </p:txBody>
@@ -742,12 +741,12 @@
           <a:lstStyle/>
           <a:p>
             <a:r>
-              <a:t>【架构】真实执行</a:t>
-            </a:r>
-          </a:p>
-          <a:p>
-            <a:r>
-              <a:t>目的：用真实 trace 证明流程与耗时，不回避冷启动。</a:t>
+              <a:t>【架构】工具表</a:t>
+            </a:r>
+          </a:p>
+          <a:p>
+            <a:r>
+              <a:t>目的：用表格讲清工具契约，而不是罗列名称。</a:t>
             </a:r>
           </a:p>
           <a:p>
@@ -757,22 +756,22 @@
           </a:p>
           <a:p>
             <a:r>
-              <a:t>- 这是"这个结果什么意思"的真实执行：10 个节点，act 占 139ms。</a:t>
-            </a:r>
-          </a:p>
-          <a:p>
-            <a:r>
-              <a:t>- act 里同时跑了 predict、explain 和特征词典检索，所以是最大头。</a:t>
-            </a:r>
-          </a:p>
-          <a:p>
-            <a:r>
-              <a:t>- 医学问题首次会到 30s，主要是 90MB 模型加载和重排；热查询约 1s。</a:t>
-            </a:r>
-          </a:p>
-          <a:p>
-            <a:r>
-              <a:t>过渡：工具是 act 的手脚，下面看 13 个工具。</a:t>
+              <a:t>- 每个工具都有 schema、权限、超时、幂等标记；调用入口只有一个。</a:t>
+            </a:r>
+          </a:p>
+          <a:p>
+            <a:r>
+              <a:t>- 导出类非幂等，避免同问同答缓存返回旧文件；delegate 超时 90s。</a:t>
+            </a:r>
+          </a:p>
+          <a:p>
+            <a:r>
+              <a:t>- 模型不能直接读数据库或文件，权限在调用前判定。</a:t>
+            </a:r>
+          </a:p>
+          <a:p>
+            <a:r>
+              <a:t>过渡：工具之外，先决定走哪条路径：意图路由。</a:t>
             </a:r>
           </a:p>
         </p:txBody>
@@ -842,12 +841,12 @@
           <a:lstStyle/>
           <a:p>
             <a:r>
-              <a:t>【架构】工具表</a:t>
-            </a:r>
-          </a:p>
-          <a:p>
-            <a:r>
-              <a:t>目的：用表格讲清工具契约，而不是罗列名称。</a:t>
+              <a:t>【架构】意图路由</a:t>
+            </a:r>
+          </a:p>
+          <a:p>
+            <a:r>
+              <a:t>目的：讲分类规则、顺序和一个真实 bug。</a:t>
             </a:r>
           </a:p>
           <a:p>
@@ -857,22 +856,22 @@
           </a:p>
           <a:p>
             <a:r>
-              <a:t>- 每个工具都有 schema、权限、超时、幂等标记；调用入口只有一个。</a:t>
-            </a:r>
-          </a:p>
-          <a:p>
-            <a:r>
-              <a:t>- 导出类非幂等，避免同问同答缓存返回旧文件；delegate 超时 90s。</a:t>
-            </a:r>
-          </a:p>
-          <a:p>
-            <a:r>
-              <a:t>- 模型不能直接读数据库或文件，权限在调用前判定。</a:t>
-            </a:r>
-          </a:p>
-          <a:p>
-            <a:r>
-              <a:t>过渡：工具之外，先决定走哪条路径：意图路由。</a:t>
+              <a:t>- 13 类意图覆盖解读、特征、医学、操作、历史、导出、对比、拒答等。</a:t>
+            </a:r>
+          </a:p>
+          <a:p>
+            <a:r>
+              <a:t>- 顺序很重要：导出动作要先判，否则"怎么导出报告"会被当成能力询问。</a:t>
+            </a:r>
+          </a:p>
+          <a:p>
+            <a:r>
+              <a:t>- 我们踩过"副作用"含"用"被判成操作问题的 bug，已修复并加回归用例。</a:t>
+            </a:r>
+          </a:p>
+          <a:p>
+            <a:r>
+              <a:t>过渡：路由之后，同一套图有两种交付方式。</a:t>
             </a:r>
           </a:p>
         </p:txBody>
@@ -942,12 +941,12 @@
           <a:lstStyle/>
           <a:p>
             <a:r>
-              <a:t>【架构】意图路由</a:t>
-            </a:r>
-          </a:p>
-          <a:p>
-            <a:r>
-              <a:t>目的：讲分类规则、顺序和一个真实 bug。</a:t>
+              <a:t>【架构】同步与流式</a:t>
+            </a:r>
+          </a:p>
+          <a:p>
+            <a:r>
+              <a:t>目的：解释两套入口的必要性。</a:t>
             </a:r>
           </a:p>
           <a:p>
@@ -957,22 +956,22 @@
           </a:p>
           <a:p>
             <a:r>
-              <a:t>- 13 类意图覆盖解读、特征、医学、操作、历史、导出、对比、拒答等。</a:t>
-            </a:r>
-          </a:p>
-          <a:p>
-            <a:r>
-              <a:t>- 顺序很重要：导出动作要先判，否则"怎么导出报告"会被当成能力询问。</a:t>
-            </a:r>
-          </a:p>
-          <a:p>
-            <a:r>
-              <a:t>- 我们踩过"副作用"含"用"被判成操作问题的 bug，已修复并加回归用例。</a:t>
-            </a:r>
-          </a:p>
-          <a:p>
-            <a:r>
-              <a:t>过渡：路由之后，同一套图有两种交付方式。</a:t>
+              <a:t>- 同步接口输出稳定，评测和脚本直接断言字段。</a:t>
+            </a:r>
+          </a:p>
+          <a:p>
+            <a:r>
+              <a:t>- 流式接口把 thinking、token、工具调用推给前端，用户能看到进度。</a:t>
+            </a:r>
+          </a:p>
+          <a:p>
+            <a:r>
+              <a:t>- 两条链路共用同一个 Graph；流式失败会发 fallback 事件，前端自动重试。</a:t>
+            </a:r>
+          </a:p>
+          <a:p>
+            <a:r>
+              <a:t>过渡：还有一种执行体：子代理。</a:t>
             </a:r>
           </a:p>
         </p:txBody>
@@ -1042,12 +1041,12 @@
           <a:lstStyle/>
           <a:p>
             <a:r>
-              <a:t>【架构】同步与流式</a:t>
-            </a:r>
-          </a:p>
-          <a:p>
-            <a:r>
-              <a:t>目的：解释两套入口的必要性。</a:t>
+              <a:t>【架构】子代理</a:t>
+            </a:r>
+          </a:p>
+          <a:p>
+            <a:r>
+              <a:t>目的：讲清 delegate 的边界与动机。</a:t>
             </a:r>
           </a:p>
           <a:p>
@@ -1057,22 +1056,22 @@
           </a:p>
           <a:p>
             <a:r>
-              <a:t>- 同步接口输出稳定，评测和脚本直接断言字段。</a:t>
-            </a:r>
-          </a:p>
-          <a:p>
-            <a:r>
-              <a:t>- 流式接口把 thinking、token、工具调用推给前端，用户能看到进度。</a:t>
-            </a:r>
-          </a:p>
-          <a:p>
-            <a:r>
-              <a:t>- 两条链路共用同一个 Graph；流式失败会发 fallback 事件，前端自动重试。</a:t>
-            </a:r>
-          </a:p>
-          <a:p>
-            <a:r>
-              <a:t>过渡：还有一种执行体：子代理。</a:t>
+              <a:t>- 主代理一次只处理一个问题；长任务拆给子代理。</a:t>
+            </a:r>
+          </a:p>
+          <a:p>
+            <a:r>
+              <a:t>- 子代理只读、不能递归、90 秒超时；失败主代理降级。</a:t>
+            </a:r>
+          </a:p>
+          <a:p>
+            <a:r>
+              <a:t>- 子步骤通过 sub_steps 事件回传，用户仍能看到过程。</a:t>
+            </a:r>
+          </a:p>
+          <a:p>
+            <a:r>
+              <a:t>过渡：执行体之外，还要决定"敢不敢下结论"。</a:t>
             </a:r>
           </a:p>
         </p:txBody>
@@ -1142,12 +1141,12 @@
           <a:lstStyle/>
           <a:p>
             <a:r>
-              <a:t>【架构】子代理</a:t>
-            </a:r>
-          </a:p>
-          <a:p>
-            <a:r>
-              <a:t>目的：讲清 delegate 的边界与动机。</a:t>
+              <a:t>【可信度】三档不确定性</a:t>
+            </a:r>
+          </a:p>
+          <a:p>
+            <a:r>
+              <a:t>目的：讲清阈值、代价和弃权话术。</a:t>
             </a:r>
           </a:p>
           <a:p>
@@ -1157,22 +1156,22 @@
           </a:p>
           <a:p>
             <a:r>
-              <a:t>- 主代理一次只处理一个问题；长任务拆给子代理。</a:t>
-            </a:r>
-          </a:p>
-          <a:p>
-            <a:r>
-              <a:t>- 子代理只读、不能递归、90 秒超时；失败主代理降级。</a:t>
-            </a:r>
-          </a:p>
-          <a:p>
-            <a:r>
-              <a:t>- 子步骤通过 sub_steps 事件回传，用户仍能看到过程。</a:t>
-            </a:r>
-          </a:p>
-          <a:p>
-            <a:r>
-              <a:t>过渡：执行体之外，还要决定"敢不敢下结论"。</a:t>
+              <a:t>- 置信档正常回答；谨慎档给倾向但降级措辞；弃权档直接拒绝下结论。</a:t>
+            </a:r>
+          </a:p>
+          <a:p>
+            <a:r>
+              <a:t>- 0.79 / 0.41 来自校准曲线与误判成本；15 是训练分布距离上限。</a:t>
+            </a:r>
+          </a:p>
+          <a:p>
+            <a:r>
+              <a:t>- 弃权不是失败，它把错误成本从"误导"降成"让用户补信息"。</a:t>
+            </a:r>
+          </a:p>
+          <a:p>
+            <a:r>
+              <a:t>过渡：判断可信之后，解释要逐句可核对。</a:t>
             </a:r>
           </a:p>
         </p:txBody>
@@ -1242,12 +1241,12 @@
           <a:lstStyle/>
           <a:p>
             <a:r>
-              <a:t>【可信度】三档不确定性</a:t>
-            </a:r>
-          </a:p>
-          <a:p>
-            <a:r>
-              <a:t>目的：讲清阈值、代价和弃权话术。</a:t>
+              <a:t>【可信度】Grounding</a:t>
+            </a:r>
+          </a:p>
+          <a:p>
+            <a:r>
+              <a:t>目的：讲句子级核对的四个步骤和容差。</a:t>
             </a:r>
           </a:p>
           <a:p>
@@ -1257,22 +1256,22 @@
           </a:p>
           <a:p>
             <a:r>
-              <a:t>- 置信档正常回答；谨慎档给倾向但降级措辞；弃权档直接拒绝下结论。</a:t>
-            </a:r>
-          </a:p>
-          <a:p>
-            <a:r>
-              <a:t>- 0.79 / 0.41 来自校准曲线与误判成本；15 是训练分布距离上限。</a:t>
-            </a:r>
-          </a:p>
-          <a:p>
-            <a:r>
-              <a:t>- 弃权不是失败，它把错误成本从"误导"降成"让用户补信息"。</a:t>
-            </a:r>
-          </a:p>
-          <a:p>
-            <a:r>
-              <a:t>过渡：判断可信之后，解释要逐句可核对。</a:t>
+              <a:t>- 切句是为了逐句核对，而不是整段糊过去。</a:t>
+            </a:r>
+          </a:p>
+          <a:p>
+            <a:r>
+              <a:t>- 数字对账容差 0.02 或 0.2%，编造的数字最容易被识破。</a:t>
+            </a:r>
+          </a:p>
+          <a:p>
+            <a:r>
+              <a:t>- 无出处标"推断"或删除；verify 返回 dropped 数量。</a:t>
+            </a:r>
+          </a:p>
+          <a:p>
+            <a:r>
+              <a:t>过渡：看真实回答里的引用长什么样。</a:t>
             </a:r>
           </a:p>
         </p:txBody>
@@ -1342,12 +1341,12 @@
           <a:lstStyle/>
           <a:p>
             <a:r>
-              <a:t>【可信度】Grounding</a:t>
-            </a:r>
-          </a:p>
-          <a:p>
-            <a:r>
-              <a:t>目的：讲句子级核对的四个步骤和容差。</a:t>
+              <a:t>【可信度】可溯源回答</a:t>
+            </a:r>
+          </a:p>
+          <a:p>
+            <a:r>
+              <a:t>目的：用截图证明引用可点、来源可查。</a:t>
             </a:r>
           </a:p>
           <a:p>
@@ -1357,22 +1356,22 @@
           </a:p>
           <a:p>
             <a:r>
-              <a:t>- 切句是为了逐句核对，而不是整段糊过去。</a:t>
-            </a:r>
-          </a:p>
-          <a:p>
-            <a:r>
-              <a:t>- 数字对账容差 0.02 或 0.2%，编造的数字最容易被识破。</a:t>
-            </a:r>
-          </a:p>
-          <a:p>
-            <a:r>
-              <a:t>- 无出处标"推断"或删除；verify 返回 dropped 数量。</a:t>
-            </a:r>
-          </a:p>
-          <a:p>
-            <a:r>
-              <a:t>过渡：看真实回答里的引用长什么样。</a:t>
+              <a:t>- 正文里的 [FEAT-008] 和底部芯片是同一套 clause_id。</a:t>
+            </a:r>
+          </a:p>
+          <a:p>
+            <a:r>
+              <a:t>- 芯片标注来源级别：特征词典、NCI PDQ、指南。</a:t>
+            </a:r>
+          </a:p>
+          <a:p>
+            <a:r>
+              <a:t>- 没有依据的句子会被标"推断"或直接删掉。</a:t>
+            </a:r>
+          </a:p>
+          <a:p>
+            <a:r>
+              <a:t>过渡：进入知识库：这些条款从哪来。</a:t>
             </a:r>
           </a:p>
         </p:txBody>
@@ -1442,12 +1441,12 @@
           <a:lstStyle/>
           <a:p>
             <a:r>
-              <a:t>【可信度】可溯源回答</a:t>
-            </a:r>
-          </a:p>
-          <a:p>
-            <a:r>
-              <a:t>目的：用截图证明引用可点、来源可查。</a:t>
+              <a:t>【过渡】章节页：知识库</a:t>
+            </a:r>
+          </a:p>
+          <a:p>
+            <a:r>
+              <a:t>目的：切到 RAG 部分。</a:t>
             </a:r>
           </a:p>
           <a:p>
@@ -1457,22 +1456,22 @@
           </a:p>
           <a:p>
             <a:r>
-              <a:t>- 正文里的 [FEAT-008] 和底部芯片是同一套 clause_id。</a:t>
-            </a:r>
-          </a:p>
-          <a:p>
-            <a:r>
-              <a:t>- 芯片标注来源级别：特征词典、NCI PDQ、指南。</a:t>
-            </a:r>
-          </a:p>
-          <a:p>
-            <a:r>
-              <a:t>- 没有依据的句子会被标"推断"或直接删掉。</a:t>
-            </a:r>
-          </a:p>
-          <a:p>
-            <a:r>
-              <a:t>过渡：进入知识库：这些条款从哪来。</a:t>
+              <a:t>- 上一部分解决"谁在说"，这一部分解决"依据从哪来"。</a:t>
+            </a:r>
+          </a:p>
+          <a:p>
+            <a:r>
+              <a:t>- 顺序是：语料构成 → 治理 → 索引 → 混合检索 → 引用规则。</a:t>
+            </a:r>
+          </a:p>
+          <a:p>
+            <a:r>
+              <a:t>- 还会给出三个问题的前后对比。</a:t>
+            </a:r>
+          </a:p>
+          <a:p>
+            <a:r>
+              <a:t>过渡：先看语料规模。</a:t>
             </a:r>
           </a:p>
         </p:txBody>
@@ -1542,12 +1541,12 @@
           <a:lstStyle/>
           <a:p>
             <a:r>
-              <a:t>【过渡】章节页：知识库</a:t>
-            </a:r>
-          </a:p>
-          <a:p>
-            <a:r>
-              <a:t>目的：切到 RAG 部分。</a:t>
+              <a:t>【RAG】语料构成</a:t>
+            </a:r>
+          </a:p>
+          <a:p>
+            <a:r>
+              <a:t>目的：给出规模与来源结构，说明权威性分层。</a:t>
             </a:r>
           </a:p>
           <a:p>
@@ -1557,22 +1556,22 @@
           </a:p>
           <a:p>
             <a:r>
-              <a:t>- 上一部分解决"谁在说"，这一部分解决"依据从哪来"。</a:t>
-            </a:r>
-          </a:p>
-          <a:p>
-            <a:r>
-              <a:t>- 顺序是：语料构成 → 治理 → 索引 → 混合检索 → 引用规则。</a:t>
-            </a:r>
-          </a:p>
-          <a:p>
-            <a:r>
-              <a:t>- 还会给出三个问题的前后对比。</a:t>
-            </a:r>
-          </a:p>
-          <a:p>
-            <a:r>
-              <a:t>过渡：先看语料规模。</a:t>
+              <a:t>- NCI PDQ 是主力：治疗 487、筛查 212、预防 141。</a:t>
+            </a:r>
+          </a:p>
+          <a:p>
+            <a:r>
+              <a:t>- 中文来源包括 WHO、中国指南、NHS、MedlinePlus、维基。</a:t>
+            </a:r>
+          </a:p>
+          <a:p>
+            <a:r>
+              <a:t>- 特征词典、系统文档、FAQ 单独成域，避免和医学内容互相污染。</a:t>
+            </a:r>
+          </a:p>
+          <a:p>
+            <a:r>
+              <a:t>过渡：但有语料不等于能检索：治理前后差别很大。</a:t>
             </a:r>
           </a:p>
         </p:txBody>
@@ -1742,12 +1741,12 @@
           <a:lstStyle/>
           <a:p>
             <a:r>
-              <a:t>【RAG】语料构成</a:t>
-            </a:r>
-          </a:p>
-          <a:p>
-            <a:r>
-              <a:t>目的：给出规模与来源结构，说明权威性分层。</a:t>
+              <a:t>【RAG】语料治理</a:t>
+            </a:r>
+          </a:p>
+          <a:p>
+            <a:r>
+              <a:t>目的：说明"知识库乱"具体怎么修的。</a:t>
             </a:r>
           </a:p>
           <a:p>
@@ -1757,22 +1756,22 @@
           </a:p>
           <a:p>
             <a:r>
-              <a:t>- NCI PDQ 是主力：治疗 487、筛查 212、预防 141。</a:t>
-            </a:r>
-          </a:p>
-          <a:p>
-            <a:r>
-              <a:t>- 中文来源包括 WHO、中国指南、NHS、MedlinePlus、维基。</a:t>
-            </a:r>
-          </a:p>
-          <a:p>
-            <a:r>
-              <a:t>- 特征词典、系统文档、FAQ 单独成域，避免和医学内容互相污染。</a:t>
-            </a:r>
-          </a:p>
-          <a:p>
-            <a:r>
-              <a:t>过渡：但有语料不等于能检索：治理前后差别很大。</a:t>
+              <a:t>- 之前按 1100 字硬切，一个章节切成 3–8 段，引用到"续 8"就丢上下文。</a:t>
+            </a:r>
+          </a:p>
+          <a:p>
+            <a:r>
+              <a:t>- 现在按句子边界切 260–900 字，噪声章节直接删，重复文本哈希去重。</a:t>
+            </a:r>
+          </a:p>
+          <a:p>
+            <a:r>
+              <a:t>- 补了副作用三源，因为之前问"化疗副作用"只能召回激素治疗。</a:t>
+            </a:r>
+          </a:p>
+          <a:p>
+            <a:r>
+              <a:t>过渡：治理完，看索引里到底存了什么。</a:t>
             </a:r>
           </a:p>
         </p:txBody>
@@ -1842,12 +1841,12 @@
           <a:lstStyle/>
           <a:p>
             <a:r>
-              <a:t>【RAG】语料治理</a:t>
-            </a:r>
-          </a:p>
-          <a:p>
-            <a:r>
-              <a:t>目的：说明"知识库乱"具体怎么修的。</a:t>
+              <a:t>【RAG】索引结构</a:t>
+            </a:r>
+          </a:p>
+          <a:p>
+            <a:r>
+              <a:t>目的：讲清索引表、规模和一次真实的 OOM 事故。</a:t>
             </a:r>
           </a:p>
           <a:p>
@@ -1857,22 +1856,22 @@
           </a:p>
           <a:p>
             <a:r>
-              <a:t>- 之前按 1100 字硬切，一个章节切成 3–8 段，引用到"续 8"就丢上下文。</a:t>
-            </a:r>
-          </a:p>
-          <a:p>
-            <a:r>
-              <a:t>- 现在按句子边界切 260–900 字，噪声章节直接删，重复文本哈希去重。</a:t>
-            </a:r>
-          </a:p>
-          <a:p>
-            <a:r>
-              <a:t>- 补了副作用三源，因为之前问"化疗副作用"只能召回激素治疗。</a:t>
-            </a:r>
-          </a:p>
-          <a:p>
-            <a:r>
-              <a:t>过渡：治理完，看索引里到底存了什么。</a:t>
+              <a:t>- rag_chunks 存正文与元数据；rag_terms 是倒排；rag_vectors 存 512 维向量。</a:t>
+            </a:r>
+          </a:p>
+          <a:p>
+            <a:r>
+              <a:t>- 1,035 条向量不需要向量库，内存余弦足够，单次 &lt;5ms。</a:t>
+            </a:r>
+          </a:p>
+          <a:p>
+            <a:r>
+              <a:t>- 部署时现场构建曾 OOM，后来改成随包发布 4MB SQLite。</a:t>
+            </a:r>
+          </a:p>
+          <a:p>
+            <a:r>
+              <a:t>过渡：看检索怎么把对的条款捞出来。</a:t>
             </a:r>
           </a:p>
         </p:txBody>
@@ -1942,12 +1941,12 @@
           <a:lstStyle/>
           <a:p>
             <a:r>
-              <a:t>【RAG】索引结构</a:t>
-            </a:r>
-          </a:p>
-          <a:p>
-            <a:r>
-              <a:t>目的：讲清索引表、规模和一次真实的 OOM 事故。</a:t>
+              <a:t>【RAG】混合检索</a:t>
+            </a:r>
+          </a:p>
+          <a:p>
+            <a:r>
+              <a:t>目的：讲清每一路的作用、RRF 公式和降级链。</a:t>
             </a:r>
           </a:p>
           <a:p>
@@ -1957,22 +1956,22 @@
           </a:p>
           <a:p>
             <a:r>
-              <a:t>- rag_chunks 存正文与元数据；rag_terms 是倒排；rag_vectors 存 512 维向量。</a:t>
-            </a:r>
-          </a:p>
-          <a:p>
-            <a:r>
-              <a:t>- 1,035 条向量不需要向量库，内存余弦足够，单次 &lt;5ms。</a:t>
-            </a:r>
-          </a:p>
-          <a:p>
-            <a:r>
-              <a:t>- 部署时现场构建曾 OOM，后来改成随包发布 4MB SQLite。</a:t>
-            </a:r>
-          </a:p>
-          <a:p>
-            <a:r>
-              <a:t>过渡：看检索怎么把对的条款捞出来。</a:t>
+              <a:t>- 纯词法换个说法就搜不到；纯向量对编号和专有名词不敏感。</a:t>
+            </a:r>
+          </a:p>
+          <a:p>
+            <a:r>
+              <a:t>- RRF 只看排名，不需要分数归一化；k=60 是常用平滑值。</a:t>
+            </a:r>
+          </a:p>
+          <a:p>
+            <a:r>
+              <a:t>- 重排用 LLM Top20 进 Top3 出；失败自动退回 RRF，不阻断回答。</a:t>
+            </a:r>
+          </a:p>
+          <a:p>
+            <a:r>
+              <a:t>过渡：有了召回，还要决定哪些条款能进引用。</a:t>
             </a:r>
           </a:p>
         </p:txBody>
@@ -2042,12 +2041,12 @@
           <a:lstStyle/>
           <a:p>
             <a:r>
-              <a:t>【RAG】混合检索</a:t>
-            </a:r>
-          </a:p>
-          <a:p>
-            <a:r>
-              <a:t>目的：讲清每一路的作用、RRF 公式和降级链。</a:t>
+              <a:t>【RAG】引用规则</a:t>
+            </a:r>
+          </a:p>
+          <a:p>
+            <a:r>
+              <a:t>目的：解释域路由、门槛、重排和降级。</a:t>
             </a:r>
           </a:p>
           <a:p>
@@ -2057,22 +2056,22 @@
           </a:p>
           <a:p>
             <a:r>
-              <a:t>- 纯词法换个说法就搜不到；纯向量对编号和专有名词不敏感。</a:t>
-            </a:r>
-          </a:p>
-          <a:p>
-            <a:r>
-              <a:t>- RRF 只看排名，不需要分数归一化；k=60 是常用平滑值。</a:t>
-            </a:r>
-          </a:p>
-          <a:p>
-            <a:r>
-              <a:t>- 重排用 LLM Top20 进 Top3 出；失败自动退回 RRF，不阻断回答。</a:t>
-            </a:r>
-          </a:p>
-          <a:p>
-            <a:r>
-              <a:t>过渡：有了召回，还要决定哪些条款能进引用。</a:t>
+              <a:t>- 域路由解决"系统文档抢医学问题排名"的问题。</a:t>
+            </a:r>
+          </a:p>
+          <a:p>
+            <a:r>
+              <a:t>- 门槛解决"检索到就挂上"的问题，分数不够就不引。</a:t>
+            </a:r>
+          </a:p>
+          <a:p>
+            <a:r>
+              <a:t>- 重排和向量失败都有降级路径，保证可用性。</a:t>
+            </a:r>
+          </a:p>
+          <a:p>
+            <a:r>
+              <a:t>过渡：看三个真实问题的前后对比。</a:t>
             </a:r>
           </a:p>
         </p:txBody>
@@ -2142,12 +2141,12 @@
           <a:lstStyle/>
           <a:p>
             <a:r>
-              <a:t>【RAG】引用规则</a:t>
-            </a:r>
-          </a:p>
-          <a:p>
-            <a:r>
-              <a:t>目的：解释域路由、门槛、重排和降级。</a:t>
+              <a:t>【RAG】检索对比</a:t>
+            </a:r>
+          </a:p>
+          <a:p>
+            <a:r>
+              <a:t>目的：用三个具体问题展示修复前后的引用差异。</a:t>
             </a:r>
           </a:p>
           <a:p>
@@ -2157,22 +2156,22 @@
           </a:p>
           <a:p>
             <a:r>
-              <a:t>- 域路由解决"系统文档抢医学问题排名"的问题。</a:t>
-            </a:r>
-          </a:p>
-          <a:p>
-            <a:r>
-              <a:t>- 门槛解决"检索到就挂上"的问题，分数不够就不引。</a:t>
-            </a:r>
-          </a:p>
-          <a:p>
-            <a:r>
-              <a:t>- 重排和向量失败都有降级路径，保证可用性。</a:t>
-            </a:r>
-          </a:p>
-          <a:p>
-            <a:r>
-              <a:t>过渡：看三个真实问题的前后对比。</a:t>
+              <a:t>- 副作用问题之前只能召回激素治疗，现在能命中副作用管理条款。</a:t>
+            </a:r>
+          </a:p>
+          <a:p>
+            <a:r>
+              <a:t>- 导出的问题之前召回"助手能做什么"，现在走策展 FAQ。</a:t>
+            </a:r>
+          </a:p>
+          <a:p>
+            <a:r>
+              <a:t>- 代价是冷启动 9 秒；热查询 0.9 秒，知识库页面有向量条数可核对。</a:t>
+            </a:r>
+          </a:p>
+          <a:p>
+            <a:r>
+              <a:t>过渡：看知识库页面实际怎么呈现。</a:t>
             </a:r>
           </a:p>
         </p:txBody>
@@ -2242,12 +2241,12 @@
           <a:lstStyle/>
           <a:p>
             <a:r>
-              <a:t>【RAG】检索对比</a:t>
-            </a:r>
-          </a:p>
-          <a:p>
-            <a:r>
-              <a:t>目的：用三个具体问题展示修复前后的引用差异。</a:t>
+              <a:t>【产品】知识库页面</a:t>
+            </a:r>
+          </a:p>
+          <a:p>
+            <a:r>
+              <a:t>目的：展示知识库不是黑盒：用户能自己查、自己核对。</a:t>
             </a:r>
           </a:p>
           <a:p>
@@ -2257,22 +2256,22 @@
           </a:p>
           <a:p>
             <a:r>
-              <a:t>- 副作用问题之前只能召回激素治疗，现在能命中副作用管理条款。</a:t>
-            </a:r>
-          </a:p>
-          <a:p>
-            <a:r>
-              <a:t>- 导出的问题之前召回"助手能做什么"，现在走策展 FAQ。</a:t>
-            </a:r>
-          </a:p>
-          <a:p>
-            <a:r>
-              <a:t>- 代价是冷启动 9 秒；热查询 0.9 秒，知识库页面有向量条数可核对。</a:t>
-            </a:r>
-          </a:p>
-          <a:p>
-            <a:r>
-              <a:t>过渡：看知识库页面实际怎么呈现。</a:t>
+              <a:t>- 首屏服务端渲染 40 条，接口挂了也不会空白。</a:t>
+            </a:r>
+          </a:p>
+          <a:p>
+            <a:r>
+              <a:t>- 域标签和关键词过滤走服务端分页，页面只有 18KB。</a:t>
+            </a:r>
+          </a:p>
+          <a:p>
+            <a:r>
+              <a:t>- 混合检索按钮显示重排序号与相关度。</a:t>
+            </a:r>
+          </a:p>
+          <a:p>
+            <a:r>
+              <a:t>过渡：用户端讲完，切到管理端与 Coze。</a:t>
             </a:r>
           </a:p>
         </p:txBody>
@@ -2342,12 +2341,12 @@
           <a:lstStyle/>
           <a:p>
             <a:r>
-              <a:t>【产品】知识库页面</a:t>
-            </a:r>
-          </a:p>
-          <a:p>
-            <a:r>
-              <a:t>目的：展示知识库不是黑盒：用户能自己查、自己核对。</a:t>
+              <a:t>【过渡】章节页：运营</a:t>
+            </a:r>
+          </a:p>
+          <a:p>
+            <a:r>
+              <a:t>目的：切到管理端与工程交付。</a:t>
             </a:r>
           </a:p>
           <a:p>
@@ -2357,22 +2356,22 @@
           </a:p>
           <a:p>
             <a:r>
-              <a:t>- 首屏服务端渲染 40 条，接口挂了也不会空白。</a:t>
-            </a:r>
-          </a:p>
-          <a:p>
-            <a:r>
-              <a:t>- 域标签和关键词过滤走服务端分页，页面只有 18KB。</a:t>
-            </a:r>
-          </a:p>
-          <a:p>
-            <a:r>
-              <a:t>- 混合检索按钮显示重排序号与相关度。</a:t>
-            </a:r>
-          </a:p>
-          <a:p>
-            <a:r>
-              <a:t>过渡：用户端讲完，切到管理端与 Coze。</a:t>
+              <a:t>- 最后一部分回答：系统怎么运营、质量怎么保证、边界在哪。</a:t>
+            </a:r>
+          </a:p>
+          <a:p>
+            <a:r>
+              <a:t>- 管理端与 Coze 是旁路，不进入诊断链路。</a:t>
+            </a:r>
+          </a:p>
+          <a:p>
+            <a:r>
+              <a:t>- 最后会主动讲局限，而不是只讲成绩。</a:t>
+            </a:r>
+          </a:p>
+          <a:p>
+            <a:r>
+              <a:t>过渡：先看管理端。</a:t>
             </a:r>
           </a:p>
         </p:txBody>
@@ -2442,12 +2441,12 @@
           <a:lstStyle/>
           <a:p>
             <a:r>
-              <a:t>【过渡】章节页：运营</a:t>
-            </a:r>
-          </a:p>
-          <a:p>
-            <a:r>
-              <a:t>目的：切到管理端与工程交付。</a:t>
+              <a:t>【运营】管理端</a:t>
+            </a:r>
+          </a:p>
+          <a:p>
+            <a:r>
+              <a:t>目的：说明管理端与用户端隔离，运营数据实时可看。</a:t>
             </a:r>
           </a:p>
           <a:p>
@@ -2457,22 +2456,22 @@
           </a:p>
           <a:p>
             <a:r>
-              <a:t>- 最后一部分回答：系统怎么运营、质量怎么保证、边界在哪。</a:t>
-            </a:r>
-          </a:p>
-          <a:p>
-            <a:r>
-              <a:t>- 管理端与 Coze 是旁路，不进入诊断链路。</a:t>
-            </a:r>
-          </a:p>
-          <a:p>
-            <a:r>
-              <a:t>- 最后会主动讲局限，而不是只讲成绩。</a:t>
-            </a:r>
-          </a:p>
-          <a:p>
-            <a:r>
-              <a:t>过渡：先看管理端。</a:t>
+              <a:t>- 管理端跑在 5001，Nginx 反代到 /console，不共享 session。</a:t>
+            </a:r>
+          </a:p>
+          <a:p>
+            <a:r>
+              <a:t>- JWT + bcrypt + 权限表，普通管理员看不到敏感操作。</a:t>
+            </a:r>
+          </a:p>
+          <a:p>
+            <a:r>
+              <a:t>- 看板数据来自真实数据库：310 次预测、18 个启用用户。</a:t>
+            </a:r>
+          </a:p>
+          <a:p>
+            <a:r>
+              <a:t>过渡：管理端里最特别的是 Coze。</a:t>
             </a:r>
           </a:p>
         </p:txBody>
@@ -2542,12 +2541,12 @@
           <a:lstStyle/>
           <a:p>
             <a:r>
-              <a:t>【运营】管理端</a:t>
-            </a:r>
-          </a:p>
-          <a:p>
-            <a:r>
-              <a:t>目的：说明管理端与用户端隔离，运营数据实时可看。</a:t>
+              <a:t>【运营】Coze 架构</a:t>
+            </a:r>
+          </a:p>
+          <a:p>
+            <a:r>
+              <a:t>目的：讲清代理、上下文和失败边界。</a:t>
             </a:r>
           </a:p>
           <a:p>
@@ -2557,22 +2556,22 @@
           </a:p>
           <a:p>
             <a:r>
-              <a:t>- 管理端跑在 5001，Nginx 反代到 /console，不共享 session。</a:t>
-            </a:r>
-          </a:p>
-          <a:p>
-            <a:r>
-              <a:t>- JWT + bcrypt + 权限表，普通管理员看不到敏感操作。</a:t>
-            </a:r>
-          </a:p>
-          <a:p>
-            <a:r>
-              <a:t>- 看板数据来自真实数据库：310 次预测、18 个启用用户。</a:t>
-            </a:r>
-          </a:p>
-          <a:p>
-            <a:r>
-              <a:t>过渡：管理端里最特别的是 Coze。</a:t>
+              <a:t>- PAT 只在服务器环境变量，浏览器完全接触不到。</a:t>
+            </a:r>
+          </a:p>
+          <a:p>
+            <a:r>
+              <a:t>- 每次提问前从 SQLite 取快照：用户、预测、模型、AI 会话，拼进 prompt。</a:t>
+            </a:r>
+          </a:p>
+          <a:p>
+            <a:r>
+              <a:t>- Coze 失败时管理端仍可用，只影响智能体问答。</a:t>
+            </a:r>
+          </a:p>
+          <a:p>
+            <a:r>
+              <a:t>过渡：看真实 Coze 页面。</a:t>
             </a:r>
           </a:p>
         </p:txBody>
@@ -2642,12 +2641,12 @@
           <a:lstStyle/>
           <a:p>
             <a:r>
-              <a:t>【运营】Coze 架构</a:t>
-            </a:r>
-          </a:p>
-          <a:p>
-            <a:r>
-              <a:t>目的：讲清代理、上下文和失败边界。</a:t>
+              <a:t>【运营】Coze 页面</a:t>
+            </a:r>
+          </a:p>
+          <a:p>
+            <a:r>
+              <a:t>目的：展示真实运营数据与流式对话。</a:t>
             </a:r>
           </a:p>
           <a:p>
@@ -2657,22 +2656,22 @@
           </a:p>
           <a:p>
             <a:r>
-              <a:t>- PAT 只在服务器环境变量，浏览器完全接触不到。</a:t>
-            </a:r>
-          </a:p>
-          <a:p>
-            <a:r>
-              <a:t>- 每次提问前从 SQLite 取快照：用户、预测、模型、AI 会话，拼进 prompt。</a:t>
-            </a:r>
-          </a:p>
-          <a:p>
-            <a:r>
-              <a:t>- Coze 失败时管理端仍可用，只影响智能体问答。</a:t>
-            </a:r>
-          </a:p>
-          <a:p>
-            <a:r>
-              <a:t>过渡：看真实 Coze 页面。</a:t>
+              <a:t>- 左侧数据每 60 秒刷新；Coze 回答基于这些数字。</a:t>
+            </a:r>
+          </a:p>
+          <a:p>
+            <a:r>
+              <a:t>- 对话走 SSE，前端逐字渲染；令牌仍只在服务端。</a:t>
+            </a:r>
+          </a:p>
+          <a:p>
+            <a:r>
+              <a:t>- 定位是运营助手，页面底部有"不构成医疗诊断"声明。</a:t>
+            </a:r>
+          </a:p>
+          <a:p>
+            <a:r>
+              <a:t>过渡：Coze 的边界要说清楚。</a:t>
             </a:r>
           </a:p>
         </p:txBody>
@@ -2842,12 +2841,12 @@
           <a:lstStyle/>
           <a:p>
             <a:r>
-              <a:t>【运营】Coze 页面</a:t>
-            </a:r>
-          </a:p>
-          <a:p>
-            <a:r>
-              <a:t>目的：展示真实运营数据与流式对话。</a:t>
+              <a:t>【运营】Coze 边界</a:t>
+            </a:r>
+          </a:p>
+          <a:p>
+            <a:r>
+              <a:t>目的：主动划清 Coze 的能力边界。</a:t>
             </a:r>
           </a:p>
           <a:p>
@@ -2857,22 +2856,22 @@
           </a:p>
           <a:p>
             <a:r>
-              <a:t>- 左侧数据每 60 秒刷新；Coze 回答基于这些数字。</a:t>
-            </a:r>
-          </a:p>
-          <a:p>
-            <a:r>
-              <a:t>- 对话走 SSE，前端逐字渲染；令牌仍只在服务端。</a:t>
-            </a:r>
-          </a:p>
-          <a:p>
-            <a:r>
-              <a:t>- 定位是运营助手，页面底部有"不构成医疗诊断"声明。</a:t>
-            </a:r>
-          </a:p>
-          <a:p>
-            <a:r>
-              <a:t>过渡：Coze 的边界要说清楚。</a:t>
+              <a:t>- Coze 只读运营数据：预测数、用户数、模型指标、AI 会话。</a:t>
+            </a:r>
+          </a:p>
+          <a:p>
+            <a:r>
+              <a:t>- 不接患者级数据、不做诊断、不开处方；页面有免责声明。</a:t>
+            </a:r>
+          </a:p>
+          <a:p>
+            <a:r>
+              <a:t>- 用户端的拒答与三档不确定性不依赖 Coze，Coze 挂了也不影响诊断链路。</a:t>
+            </a:r>
+          </a:p>
+          <a:p>
+            <a:r>
+              <a:t>过渡：最后讲工程质量与取舍。</a:t>
             </a:r>
           </a:p>
         </p:txBody>
@@ -2942,12 +2941,12 @@
           <a:lstStyle/>
           <a:p>
             <a:r>
-              <a:t>【运营】Coze 边界</a:t>
-            </a:r>
-          </a:p>
-          <a:p>
-            <a:r>
-              <a:t>目的：主动划清 Coze 的能力边界。</a:t>
+              <a:t>【交付】工程质量</a:t>
+            </a:r>
+          </a:p>
+          <a:p>
+            <a:r>
+              <a:t>目的：用数字回答"可靠吗、能复现吗"。</a:t>
             </a:r>
           </a:p>
           <a:p>
@@ -2957,22 +2956,22 @@
           </a:p>
           <a:p>
             <a:r>
-              <a:t>- Coze 只读运营数据：预测数、用户数、模型指标、AI 会话。</a:t>
-            </a:r>
-          </a:p>
-          <a:p>
-            <a:r>
-              <a:t>- 不接患者级数据、不做诊断、不开处方；页面有免责声明。</a:t>
-            </a:r>
-          </a:p>
-          <a:p>
-            <a:r>
-              <a:t>- 用户端的拒答与三档不确定性不依赖 Coze，Coze 挂了也不影响诊断链路。</a:t>
-            </a:r>
-          </a:p>
-          <a:p>
-            <a:r>
-              <a:t>过渡：最后讲工程质量与取舍。</a:t>
+              <a:t>- 73 个单测、20 条评测、63 项冒烟，交付前全部跑过。</a:t>
+            </a:r>
+          </a:p>
+          <a:p>
+            <a:r>
+              <a:t>- 部署约 60 秒；索引重建、重启、自检都在流水线里。</a:t>
+            </a:r>
+          </a:p>
+          <a:p>
+            <a:r>
+              <a:t>- 向量随包发布，避免服务器内存不足导致部署中断。</a:t>
+            </a:r>
+          </a:p>
+          <a:p>
+            <a:r>
+              <a:t>过渡：看评测指标本身。</a:t>
             </a:r>
           </a:p>
         </p:txBody>
@@ -3042,12 +3041,12 @@
           <a:lstStyle/>
           <a:p>
             <a:r>
-              <a:t>【交付】工程质量</a:t>
-            </a:r>
-          </a:p>
-          <a:p>
-            <a:r>
-              <a:t>目的：用数字回答"可靠吗、能复现吗"。</a:t>
+              <a:t>【交付】评测结果</a:t>
+            </a:r>
+          </a:p>
+          <a:p>
+            <a:r>
+              <a:t>目的：给出评测指标，同时说明它覆盖不到什么。</a:t>
             </a:r>
           </a:p>
           <a:p>
@@ -3057,22 +3056,22 @@
           </a:p>
           <a:p>
             <a:r>
-              <a:t>- 73 个单测、20 条评测、63 项冒烟，交付前全部跑过。</a:t>
-            </a:r>
-          </a:p>
-          <a:p>
-            <a:r>
-              <a:t>- 部署约 60 秒；索引重建、重启、自检都在流水线里。</a:t>
-            </a:r>
-          </a:p>
-          <a:p>
-            <a:r>
-              <a:t>- 向量随包发布，避免服务器内存不足导致部署中断。</a:t>
-            </a:r>
-          </a:p>
-          <a:p>
-            <a:r>
-              <a:t>过渡：看评测指标本身。</a:t>
+              <a:t>- 意图、引用、拒答、升级、对账、延迟六项全部达标。</a:t>
+            </a:r>
+          </a:p>
+          <a:p>
+            <a:r>
+              <a:t>- p95 221ms 是离线确定性路径；LLM 路径会慢很多。</a:t>
+            </a:r>
+          </a:p>
+          <a:p>
+            <a:r>
+              <a:t>- 评测不覆盖自由生成质量，这是局限，后面会讲。</a:t>
+            </a:r>
+          </a:p>
+          <a:p>
+            <a:r>
+              <a:t>过渡：最后讲取舍与局限。</a:t>
             </a:r>
           </a:p>
         </p:txBody>
@@ -3142,12 +3141,12 @@
           <a:lstStyle/>
           <a:p>
             <a:r>
-              <a:t>【交付】评测结果</a:t>
-            </a:r>
-          </a:p>
-          <a:p>
-            <a:r>
-              <a:t>目的：给出评测指标，同时说明它覆盖不到什么。</a:t>
+              <a:t>【取舍】关键取舍</a:t>
+            </a:r>
+          </a:p>
+          <a:p>
+            <a:r>
+              <a:t>目的：讲四个技术选择的收益与代价。</a:t>
             </a:r>
           </a:p>
           <a:p>
@@ -3157,22 +3156,22 @@
           </a:p>
           <a:p>
             <a:r>
-              <a:t>- 意图、引用、拒答、升级、对账、延迟六项全部达标。</a:t>
-            </a:r>
-          </a:p>
-          <a:p>
-            <a:r>
-              <a:t>- p95 221ms 是离线确定性路径；LLM 路径会慢很多。</a:t>
-            </a:r>
-          </a:p>
-          <a:p>
-            <a:r>
-              <a:t>- 评测不覆盖自由生成质量，这是局限，后面会讲。</a:t>
-            </a:r>
-          </a:p>
-          <a:p>
-            <a:r>
-              <a:t>过渡：最后讲取舍与局限。</a:t>
+              <a:t>- 自研 Graph 换来可控和可测，代价是生态能力要自己补。</a:t>
+            </a:r>
+          </a:p>
+          <a:p>
+            <a:r>
+              <a:t>- 词法 + 向量换来召回，代价是模型体积和冷启动。</a:t>
+            </a:r>
+          </a:p>
+          <a:p>
+            <a:r>
+              <a:t>- SQLite 换来部署简单，代价是并发和规模上限；单 worker 也是同样的取舍。</a:t>
+            </a:r>
+          </a:p>
+          <a:p>
+            <a:r>
+              <a:t>过渡：这些代价带来什么局限。</a:t>
             </a:r>
           </a:p>
         </p:txBody>
@@ -3242,12 +3241,12 @@
           <a:lstStyle/>
           <a:p>
             <a:r>
-              <a:t>【取舍】关键取舍</a:t>
-            </a:r>
-          </a:p>
-          <a:p>
-            <a:r>
-              <a:t>目的：讲四个技术选择的收益与代价。</a:t>
+              <a:t>【取舍】局限与下一步</a:t>
+            </a:r>
+          </a:p>
+          <a:p>
+            <a:r>
+              <a:t>目的：主动暴露局限，建立可信度。</a:t>
             </a:r>
           </a:p>
           <a:p>
@@ -3257,22 +3256,22 @@
           </a:p>
           <a:p>
             <a:r>
-              <a:t>- 自研 Graph 换来可控和可测，代价是生态能力要自己补。</a:t>
-            </a:r>
-          </a:p>
-          <a:p>
-            <a:r>
-              <a:t>- 词法 + 向量换来召回，代价是模型体积和冷启动。</a:t>
-            </a:r>
-          </a:p>
-          <a:p>
-            <a:r>
-              <a:t>- SQLite 换来部署简单，代价是并发和规模上限；单 worker 也是同样的取舍。</a:t>
-            </a:r>
-          </a:p>
-          <a:p>
-            <a:r>
-              <a:t>过渡：这些代价带来什么局限。</a:t>
+              <a:t>- 词法仍有盲区，同义词表覆盖有限；下一步做查询改写。</a:t>
+            </a:r>
+          </a:p>
+          <a:p>
+            <a:r>
+              <a:t>- 重排有 1 秒左右延迟，冷启动 9 秒；前者可缓存，后者可预热。</a:t>
+            </a:r>
+          </a:p>
+          <a:p>
+            <a:r>
+              <a:t>- 最重要的是没有临床前瞻验证；只有 WDBC 回溯数据，不能声称临床有效。</a:t>
+            </a:r>
+          </a:p>
+          <a:p>
+            <a:r>
+              <a:t>过渡：最后收束。</a:t>
             </a:r>
           </a:p>
         </p:txBody>
@@ -3342,106 +3341,6 @@
           <a:lstStyle/>
           <a:p>
             <a:r>
-              <a:t>【取舍】局限与下一步</a:t>
-            </a:r>
-          </a:p>
-          <a:p>
-            <a:r>
-              <a:t>目的：主动暴露局限，建立可信度。</a:t>
-            </a:r>
-          </a:p>
-          <a:p>
-            <a:r>
-              <a:t>讲述要点：</a:t>
-            </a:r>
-          </a:p>
-          <a:p>
-            <a:r>
-              <a:t>- 词法仍有盲区，同义词表覆盖有限；下一步做查询改写。</a:t>
-            </a:r>
-          </a:p>
-          <a:p>
-            <a:r>
-              <a:t>- 重排有 1 秒左右延迟，冷启动 9 秒；前者可缓存，后者可预热。</a:t>
-            </a:r>
-          </a:p>
-          <a:p>
-            <a:r>
-              <a:t>- 最重要的是没有临床前瞻验证；只有 WDBC 回溯数据，不能声称临床有效。</a:t>
-            </a:r>
-          </a:p>
-          <a:p>
-            <a:r>
-              <a:t>过渡：最后收束。</a:t>
-            </a:r>
-          </a:p>
-        </p:txBody>
-      </p:sp>
-      <p:sp>
-        <p:nvSpPr>
-          <p:cNvPr id="4" name="Slide Number Placeholder 3"/>
-          <p:cNvSpPr>
-            <a:spLocks noGrp="1"/>
-          </p:cNvSpPr>
-          <p:nvPr>
-            <p:ph type="sldNum" idx="5" sz="quarter"/>
-          </p:nvPr>
-        </p:nvSpPr>
-        <p:spPr/>
-      </p:sp>
-    </p:spTree>
-  </p:cSld>
-  <p:clrMapOvr>
-    <a:masterClrMapping/>
-  </p:clrMapOvr>
-</p:notes>
-</file>
-
-<file path=ppt/notesSlides/notesSlide36.xml><?xml version="1.0" encoding="utf-8"?>
-<p:notes xmlns:a="http://schemas.openxmlformats.org/drawingml/2006/main" xmlns:p="http://schemas.openxmlformats.org/presentationml/2006/main" xmlns:r="http://schemas.openxmlformats.org/officeDocument/2006/relationships">
-  <p:cSld>
-    <p:spTree>
-      <p:nvGrpSpPr>
-        <p:cNvPr id="1" name=""/>
-        <p:cNvGrpSpPr/>
-        <p:nvPr/>
-      </p:nvGrpSpPr>
-      <p:grpSpPr>
-        <a:xfrm>
-          <a:off x="0" y="0"/>
-          <a:ext cx="0" cy="0"/>
-          <a:chOff x="0" y="0"/>
-          <a:chExt cx="0" cy="0"/>
-        </a:xfrm>
-      </p:grpSpPr>
-      <p:sp>
-        <p:nvSpPr>
-          <p:cNvPr id="2" name="Slide Image Placeholder 1"/>
-          <p:cNvSpPr>
-            <a:spLocks noGrp="1"/>
-          </p:cNvSpPr>
-          <p:nvPr>
-            <p:ph type="sldImg" idx="2"/>
-          </p:nvPr>
-        </p:nvSpPr>
-        <p:spPr/>
-      </p:sp>
-      <p:sp>
-        <p:nvSpPr>
-          <p:cNvPr id="3" name="Notes Placeholder 2"/>
-          <p:cNvSpPr>
-            <a:spLocks noGrp="1"/>
-          </p:cNvSpPr>
-          <p:nvPr>
-            <p:ph type="body" idx="3" sz="quarter"/>
-          </p:nvPr>
-        </p:nvSpPr>
-        <p:spPr/>
-        <p:txBody>
-          <a:bodyPr/>
-          <a:lstStyle/>
-          <a:p>
-            <a:r>
               <a:t>【收束】收束</a:t>
             </a:r>
           </a:p>
@@ -3547,12 +3446,12 @@
           <a:lstStyle/>
           <a:p>
             <a:r>
-              <a:t>【实现】技术栈</a:t>
-            </a:r>
-          </a:p>
-          <a:p>
-            <a:r>
-              <a:t>目的：用代码量和组件表证明系统是自建、可讲清。</a:t>
+              <a:t>【实现】预测链路</a:t>
+            </a:r>
+          </a:p>
+          <a:p>
+            <a:r>
+              <a:t>目的：把模型调用讲成六步可验证链路。</a:t>
             </a:r>
           </a:p>
           <a:p>
@@ -3562,22 +3461,22 @@
           </a:p>
           <a:p>
             <a:r>
-              <a:t>- 后端 Flask，模板 Jinja2，前端原生 JS，避免答辩环境依赖 Node 构建。</a:t>
-            </a:r>
-          </a:p>
-          <a:p>
-            <a:r>
-              <a:t>- 模型是 sklearn 集成 + 校准；检索是 TF-IDF + ONNX 嵌入，都没有外部服务。</a:t>
-            </a:r>
-          </a:p>
-          <a:p>
-            <a:r>
-              <a:t>- SQLite 18 张表，部署只需要一个文件。</a:t>
-            </a:r>
-          </a:p>
-          <a:p>
-            <a:r>
-              <a:t>过渡：看一次预测从表单到结果。</a:t>
+              <a:t>- 表单校验在前端和后端各做一次，避免单位错误进入模型。</a:t>
+            </a:r>
+          </a:p>
+          <a:p>
+            <a:r>
+              <a:t>- 标准化参数来自训练集，不是现场计算，避免数据泄漏。</a:t>
+            </a:r>
+          </a:p>
+          <a:p>
+            <a:r>
+              <a:t>- 校准后的概率才展示；原始概率偏乐观，会堆在 0.99 附近。</a:t>
+            </a:r>
+          </a:p>
+          <a:p>
+            <a:r>
+              <a:t>过渡：看结果页实际呈现。</a:t>
             </a:r>
           </a:p>
         </p:txBody>
@@ -3647,12 +3546,12 @@
           <a:lstStyle/>
           <a:p>
             <a:r>
-              <a:t>【实现】预测链路</a:t>
-            </a:r>
-          </a:p>
-          <a:p>
-            <a:r>
-              <a:t>目的：把模型调用讲成六步可验证链路。</a:t>
+              <a:t>【产品】结果页</a:t>
+            </a:r>
+          </a:p>
+          <a:p>
+            <a:r>
+              <a:t>目的：证明结果不是一行字，而是一组可核对的证据。</a:t>
             </a:r>
           </a:p>
           <a:p>
@@ -3662,22 +3561,22 @@
           </a:p>
           <a:p>
             <a:r>
-              <a:t>- 表单校验在前端和后端各做一次，避免单位错误进入模型。</a:t>
-            </a:r>
-          </a:p>
-          <a:p>
-            <a:r>
-              <a:t>- 标准化参数来自训练集，不是现场计算，避免数据泄漏。</a:t>
-            </a:r>
-          </a:p>
-          <a:p>
-            <a:r>
-              <a:t>- 校准后的概率才展示；原始概率偏乐观，会堆在 0.99 附近。</a:t>
-            </a:r>
-          </a:p>
-          <a:p>
-            <a:r>
-              <a:t>过渡：看结果页实际呈现。</a:t>
+              <a:t>- 右侧证据强度条由置信度、输入距离和知识命中共同决定。</a:t>
+            </a:r>
+          </a:p>
+          <a:p>
+            <a:r>
+              <a:t>- Top 5 是模型在看什么，不是因果；页面明确写了这一点。</a:t>
+            </a:r>
+          </a:p>
+          <a:p>
+            <a:r>
+              <a:t>- 相似病例只做对照，不构成临床证据。</a:t>
+            </a:r>
+          </a:p>
+          <a:p>
+            <a:r>
+              <a:t>过渡：进入 Agent：这些解释是谁生成的？</a:t>
             </a:r>
           </a:p>
         </p:txBody>
@@ -3747,12 +3646,12 @@
           <a:lstStyle/>
           <a:p>
             <a:r>
-              <a:t>【产品】结果页</a:t>
-            </a:r>
-          </a:p>
-          <a:p>
-            <a:r>
-              <a:t>目的：证明结果不是一行字，而是一组可核对的证据。</a:t>
+              <a:t>【过渡】章节页：Agent</a:t>
+            </a:r>
+          </a:p>
+          <a:p>
+            <a:r>
+              <a:t>目的：把观众注意力切到用户端 Agent。</a:t>
             </a:r>
           </a:p>
           <a:p>
@@ -3762,22 +3661,22 @@
           </a:p>
           <a:p>
             <a:r>
-              <a:t>- 右侧证据强度条由置信度、输入距离和知识命中共同决定。</a:t>
-            </a:r>
-          </a:p>
-          <a:p>
-            <a:r>
-              <a:t>- Top 5 是模型在看什么，不是因果；页面明确写了这一点。</a:t>
-            </a:r>
-          </a:p>
-          <a:p>
-            <a:r>
-              <a:t>- 相似病例只做对照，不构成临床证据。</a:t>
-            </a:r>
-          </a:p>
-          <a:p>
-            <a:r>
-              <a:t>过渡：进入 Agent：这些解释是谁生成的？</a:t>
+              <a:t>- 这一部分回答：为什么不是聊天框，以及流程怎么保证可复现。</a:t>
+            </a:r>
+          </a:p>
+          <a:p>
+            <a:r>
+              <a:t>- 会先给 Graph 结构，再给状态、工具、意图、流式和子代理。</a:t>
+            </a:r>
+          </a:p>
+          <a:p>
+            <a:r>
+              <a:t>- 最后用三档不确定性和 grounding 收口。</a:t>
+            </a:r>
+          </a:p>
+          <a:p>
+            <a:r>
+              <a:t>过渡：先给 Agent 的定位。</a:t>
             </a:r>
           </a:p>
         </p:txBody>
@@ -3847,12 +3746,12 @@
           <a:lstStyle/>
           <a:p>
             <a:r>
-              <a:t>【过渡】章节页：Agent</a:t>
-            </a:r>
-          </a:p>
-          <a:p>
-            <a:r>
-              <a:t>目的：把观众注意力切到用户端 Agent。</a:t>
+              <a:t>【定位】Agent 定位</a:t>
+            </a:r>
+          </a:p>
+          <a:p>
+            <a:r>
+              <a:t>目的：重新定义 Agent：能调工具、能拒答、能回放。</a:t>
             </a:r>
           </a:p>
           <a:p>
@@ -3862,22 +3761,22 @@
           </a:p>
           <a:p>
             <a:r>
-              <a:t>- 这一部分回答：为什么不是聊天框，以及流程怎么保证可复现。</a:t>
-            </a:r>
-          </a:p>
-          <a:p>
-            <a:r>
-              <a:t>- 会先给 Graph 结构，再给状态、工具、意图、流式和子代理。</a:t>
-            </a:r>
-          </a:p>
-          <a:p>
-            <a:r>
-              <a:t>- 最后用三档不确定性和 grounding 收口。</a:t>
-            </a:r>
-          </a:p>
-          <a:p>
-            <a:r>
-              <a:t>过渡：先给 Agent 的定位。</a:t>
+              <a:t>- 聊天框只输出文本；这里要能查记录、跑模型、导报告、检索知识。</a:t>
+            </a:r>
+          </a:p>
+          <a:p>
+            <a:r>
+              <a:t>- 13 类意图决定走哪条路径，10 个节点保证流程可复现。</a:t>
+            </a:r>
+          </a:p>
+          <a:p>
+            <a:r>
+              <a:t>- 拒答是能力，不是失败；第 16 页会讲三档阈值。</a:t>
+            </a:r>
+          </a:p>
+          <a:p>
+            <a:r>
+              <a:t>过渡：看这张图具体长什么样。</a:t>
             </a:r>
           </a:p>
         </p:txBody>
@@ -3947,12 +3846,12 @@
           <a:lstStyle/>
           <a:p>
             <a:r>
-              <a:t>【定位】Agent 定位</a:t>
-            </a:r>
-          </a:p>
-          <a:p>
-            <a:r>
-              <a:t>目的：重新定义 Agent：能调工具、能拒答、能回放。</a:t>
+              <a:t>【架构】Graph 结构</a:t>
+            </a:r>
+          </a:p>
+          <a:p>
+            <a:r>
+              <a:t>目的：逐节点讲职责与两条条件边。</a:t>
             </a:r>
           </a:p>
           <a:p>
@@ -3962,22 +3861,22 @@
           </a:p>
           <a:p>
             <a:r>
-              <a:t>- 聊天框只输出文本；这里要能查记录、跑模型、导报告、检索知识。</a:t>
-            </a:r>
-          </a:p>
-          <a:p>
-            <a:r>
-              <a:t>- 13 类意图决定走哪条路径，10 个节点保证流程可复现。</a:t>
-            </a:r>
-          </a:p>
-          <a:p>
-            <a:r>
-              <a:t>- 拒答是能力，不是失败；第 16 页会讲三档阈值。</a:t>
-            </a:r>
-          </a:p>
-          <a:p>
-            <a:r>
-              <a:t>过渡：看这张图具体长什么样。</a:t>
+              <a:t>- guard 命中直接进 refuse，再走 persist；cache 命中跳过 route。</a:t>
+            </a:r>
+          </a:p>
+          <a:p>
+            <a:r>
+              <a:t>- route 之后是 act → assess → compose → verify → guard_out → persist → finish。</a:t>
+            </a:r>
+          </a:p>
+          <a:p>
+            <a:r>
+              <a:t>- 节点内部才是模型自由发挥的地方，流程本身不可被模型改写。</a:t>
+            </a:r>
+          </a:p>
+          <a:p>
+            <a:r>
+              <a:t>过渡：流程要能回放，靠的是状态和检查点。</a:t>
             </a:r>
           </a:p>
         </p:txBody>
@@ -4047,12 +3946,12 @@
           <a:lstStyle/>
           <a:p>
             <a:r>
-              <a:t>【架构】Graph 结构</a:t>
-            </a:r>
-          </a:p>
-          <a:p>
-            <a:r>
-              <a:t>目的：逐节点讲职责与两条条件边。</a:t>
+              <a:t>【架构】状态与检查点</a:t>
+            </a:r>
+          </a:p>
+          <a:p>
+            <a:r>
+              <a:t>目的：解释可回放不是口号：状态结构 + 检查点表。</a:t>
             </a:r>
           </a:p>
           <a:p>
@@ -4062,22 +3961,22 @@
           </a:p>
           <a:p>
             <a:r>
-              <a:t>- guard 命中直接进 refuse，再走 persist；cache 命中跳过 route。</a:t>
-            </a:r>
-          </a:p>
-          <a:p>
-            <a:r>
-              <a:t>- route 之后是 act → assess → compose → verify → guard_out → persist → finish。</a:t>
-            </a:r>
-          </a:p>
-          <a:p>
-            <a:r>
-              <a:t>- 节点内部才是模型自由发挥的地方，流程本身不可被模型改写。</a:t>
-            </a:r>
-          </a:p>
-          <a:p>
-            <a:r>
-              <a:t>过渡：流程要能回放，靠的是状态和检查点。</a:t>
+              <a:t>- state 里只有可序列化字段；emit 这类回调不会写进去。</a:t>
+            </a:r>
+          </a:p>
+          <a:p>
+            <a:r>
+              <a:t>- 每个节点执行完都保存 seq/node/next/state，Interrupt 也保存 pending。</a:t>
+            </a:r>
+          </a:p>
+          <a:p>
+            <a:r>
+              <a:t>- 这让我们能回答"第 4 步为什么慢""哪一步失败了"。</a:t>
+            </a:r>
+          </a:p>
+          <a:p>
+            <a:r>
+              <a:t>过渡：看一次真实执行的节点耗时。</a:t>
             </a:r>
           </a:p>
         </p:txBody>
@@ -8291,48 +8190,6 @@
 </p:sld>
 </file>
 
-<file path=ppt/slides/slide36.xml><?xml version="1.0" encoding="utf-8"?>
-<p:sld xmlns:a="http://schemas.openxmlformats.org/drawingml/2006/main" xmlns:p="http://schemas.openxmlformats.org/presentationml/2006/main" xmlns:r="http://schemas.openxmlformats.org/officeDocument/2006/relationships">
-  <p:cSld>
-    <p:spTree>
-      <p:nvGrpSpPr>
-        <p:cNvPr id="1" name=""/>
-        <p:cNvGrpSpPr/>
-        <p:nvPr/>
-      </p:nvGrpSpPr>
-      <p:grpSpPr/>
-      <p:pic>
-        <p:nvPicPr>
-          <p:cNvPr id="2" name="Picture 1" descr="slide-36.png"/>
-          <p:cNvPicPr>
-            <a:picLocks noChangeAspect="1"/>
-          </p:cNvPicPr>
-          <p:nvPr/>
-        </p:nvPicPr>
-        <p:blipFill>
-          <a:blip r:embed="rId2"/>
-          <a:stretch>
-            <a:fillRect/>
-          </a:stretch>
-        </p:blipFill>
-        <p:spPr>
-          <a:xfrm>
-            <a:off x="0" y="0"/>
-            <a:ext cx="12191695" cy="6858000"/>
-          </a:xfrm>
-          <a:prstGeom prst="rect">
-            <a:avLst/>
-          </a:prstGeom>
-        </p:spPr>
-      </p:pic>
-    </p:spTree>
-  </p:cSld>
-  <p:clrMapOvr>
-    <a:masterClrMapping/>
-  </p:clrMapOvr>
-</p:sld>
-</file>
-
 <file path=ppt/slides/slide4.xml><?xml version="1.0" encoding="utf-8"?>
 <p:sld xmlns:a="http://schemas.openxmlformats.org/drawingml/2006/main" xmlns:p="http://schemas.openxmlformats.org/presentationml/2006/main" xmlns:r="http://schemas.openxmlformats.org/officeDocument/2006/relationships">
   <p:cSld>

--- a/ppt-defense/乳腺癌辅助诊断系统-答辩.pptx
+++ b/ppt-defense/乳腺癌辅助诊断系统-答辩.pptx
@@ -1656,12 +1656,12 @@
           </a:p>
           <a:p>
             <a:r>
-              <a:t>- 医生关心依据，患者关心下一步，运营关心数据。三类问题不能用一个聊天框回答。</a:t>
-            </a:r>
-          </a:p>
-          <a:p>
-            <a:r>
-              <a:t>- 所以系统分成用户端 Agent、知识库、管理端三条线。</a:t>
+              <a:t>- 医生关心这群病人的分布和随访变化，患者关心自己的指标变化，运营关心数据。</a:t>
+            </a:r>
+          </a:p>
+          <a:p>
+            <a:r>
+              <a:t>- 所以系统要能回答群体分布、个体变化和数据运营三类问题。</a:t>
             </a:r>
           </a:p>
           <a:p>
